--- a/materials/lectures/10-graph_theory/slides.pptx
+++ b/materials/lectures/10-graph_theory/slides.pptx
@@ -7,7 +7,7 @@
     <p:sldMasterId id="2147483668" r:id="rId3"/>
   </p:sldMasterIdLst>
   <p:notesMasterIdLst>
-    <p:notesMasterId r:id="rId45"/>
+    <p:notesMasterId r:id="rId49"/>
   </p:notesMasterIdLst>
   <p:sldIdLst>
     <p:sldId id="256" r:id="rId4"/>
@@ -38,60 +38,52 @@
     <p:sldId id="836" r:id="rId29"/>
     <p:sldId id="835" r:id="rId30"/>
     <p:sldId id="838" r:id="rId31"/>
-    <p:sldId id="837" r:id="rId32"/>
-    <p:sldId id="839" r:id="rId33"/>
-    <p:sldId id="840" r:id="rId34"/>
-    <p:sldId id="841" r:id="rId35"/>
-    <p:sldId id="842" r:id="rId36"/>
-    <p:sldId id="843" r:id="rId37"/>
-    <p:sldId id="844" r:id="rId38"/>
-    <p:sldId id="845" r:id="rId39"/>
-    <p:sldId id="846" r:id="rId40"/>
-    <p:sldId id="847" r:id="rId41"/>
-    <p:sldId id="848" r:id="rId42"/>
-    <p:sldId id="849" r:id="rId43"/>
-    <p:sldId id="811" r:id="rId44"/>
+    <p:sldId id="850" r:id="rId32"/>
+    <p:sldId id="837" r:id="rId33"/>
+    <p:sldId id="851" r:id="rId34"/>
+    <p:sldId id="839" r:id="rId35"/>
+    <p:sldId id="852" r:id="rId36"/>
+    <p:sldId id="840" r:id="rId37"/>
+    <p:sldId id="853" r:id="rId38"/>
+    <p:sldId id="841" r:id="rId39"/>
+    <p:sldId id="842" r:id="rId40"/>
+    <p:sldId id="843" r:id="rId41"/>
+    <p:sldId id="844" r:id="rId42"/>
+    <p:sldId id="845" r:id="rId43"/>
+    <p:sldId id="846" r:id="rId44"/>
+    <p:sldId id="847" r:id="rId45"/>
+    <p:sldId id="848" r:id="rId46"/>
+    <p:sldId id="849" r:id="rId47"/>
+    <p:sldId id="811" r:id="rId48"/>
   </p:sldIdLst>
   <p:sldSz cx="12192000" cy="6858000"/>
   <p:notesSz cx="6858000" cy="9144000"/>
   <p:embeddedFontLst>
     <p:embeddedFont>
       <p:font typeface="Bookman Old Style" panose="02050604050505020204" pitchFamily="18" charset="0"/>
-      <p:regular r:id="rId46"/>
-      <p:bold r:id="rId47"/>
-      <p:italic r:id="rId48"/>
-      <p:boldItalic r:id="rId49"/>
-    </p:embeddedFont>
-    <p:embeddedFont>
-      <p:font typeface="Calibri" panose="020F0502020204030204" pitchFamily="34" charset="0"/>
       <p:regular r:id="rId50"/>
       <p:bold r:id="rId51"/>
       <p:italic r:id="rId52"/>
       <p:boldItalic r:id="rId53"/>
     </p:embeddedFont>
     <p:embeddedFont>
-      <p:font typeface="Calibri Light" panose="020F0302020204030204" pitchFamily="34" charset="0"/>
+      <p:font typeface="Cambria Math" panose="02040503050406030204" pitchFamily="18" charset="0"/>
       <p:regular r:id="rId54"/>
-      <p:italic r:id="rId55"/>
-    </p:embeddedFont>
-    <p:embeddedFont>
-      <p:font typeface="Cambria Math" panose="02040503050406030204" pitchFamily="18" charset="0"/>
-      <p:regular r:id="rId56"/>
     </p:embeddedFont>
     <p:embeddedFont>
       <p:font typeface="Gill Sans MT" panose="020B0502020104020203" pitchFamily="34" charset="0"/>
-      <p:regular r:id="rId57"/>
-      <p:bold r:id="rId58"/>
-      <p:italic r:id="rId59"/>
-      <p:boldItalic r:id="rId60"/>
+      <p:regular r:id="rId55"/>
+      <p:bold r:id="rId56"/>
+      <p:italic r:id="rId57"/>
+      <p:boldItalic r:id="rId58"/>
     </p:embeddedFont>
     <p:embeddedFont>
       <p:font typeface="Wingdings 3" panose="05040102010807070707" pitchFamily="18" charset="2"/>
-      <p:regular r:id="rId61"/>
+      <p:regular r:id="rId59"/>
     </p:embeddedFont>
   </p:embeddedFontLst>
   <p:custDataLst>
-    <p:tags r:id="rId62"/>
+    <p:tags r:id="rId60"/>
   </p:custDataLst>
   <p:defaultTextStyle>
     <a:defPPr>
@@ -344,7 +336,7 @@
               <a:pPr>
                 <a:defRPr/>
               </a:pPr>
-              <a:t>5/3/2023</a:t>
+              <a:t>2/8/2025</a:t>
             </a:fld>
             <a:endParaRPr lang="en-US"/>
           </a:p>
@@ -846,7 +838,7 @@
               <a:pPr>
                 <a:defRPr/>
               </a:pPr>
-              <a:t>40</a:t>
+              <a:t>44</a:t>
             </a:fld>
             <a:endParaRPr lang="en-US"/>
           </a:p>
@@ -1228,7 +1220,7 @@
               <a:pPr>
                 <a:defRPr/>
               </a:pPr>
-              <a:t>5/3/2023</a:t>
+              <a:t>2/8/2025</a:t>
             </a:fld>
             <a:endParaRPr lang="en-US"/>
           </a:p>
@@ -1472,7 +1464,7 @@
           <a:p>
             <a:fld id="{344494C4-6097-4BA9-B81C-8FE8D10E85BA}" type="datetimeFigureOut">
               <a:rPr lang="en-US" smtClean="0"/>
-              <a:t>5/3/2023</a:t>
+              <a:t>2/8/2025</a:t>
             </a:fld>
             <a:endParaRPr lang="en-US"/>
           </a:p>
@@ -1717,7 +1709,7 @@
           <a:p>
             <a:fld id="{344494C4-6097-4BA9-B81C-8FE8D10E85BA}" type="datetimeFigureOut">
               <a:rPr lang="en-US" smtClean="0"/>
-              <a:t>5/3/2023</a:t>
+              <a:t>2/8/2025</a:t>
             </a:fld>
             <a:endParaRPr lang="en-US"/>
           </a:p>
@@ -2097,7 +2089,7 @@
           <a:p>
             <a:fld id="{344494C4-6097-4BA9-B81C-8FE8D10E85BA}" type="datetimeFigureOut">
               <a:rPr lang="en-US" smtClean="0"/>
-              <a:t>5/3/2023</a:t>
+              <a:t>2/8/2025</a:t>
             </a:fld>
             <a:endParaRPr lang="en-US"/>
           </a:p>
@@ -2230,7 +2222,7 @@
           <a:p>
             <a:fld id="{344494C4-6097-4BA9-B81C-8FE8D10E85BA}" type="datetimeFigureOut">
               <a:rPr lang="en-US" smtClean="0"/>
-              <a:t>5/3/2023</a:t>
+              <a:t>2/8/2025</a:t>
             </a:fld>
             <a:endParaRPr lang="en-US"/>
           </a:p>
@@ -2341,7 +2333,7 @@
           <a:p>
             <a:fld id="{344494C4-6097-4BA9-B81C-8FE8D10E85BA}" type="datetimeFigureOut">
               <a:rPr lang="en-US" smtClean="0"/>
-              <a:t>5/3/2023</a:t>
+              <a:t>2/8/2025</a:t>
             </a:fld>
             <a:endParaRPr lang="en-US"/>
           </a:p>
@@ -2632,7 +2624,7 @@
           <a:p>
             <a:fld id="{344494C4-6097-4BA9-B81C-8FE8D10E85BA}" type="datetimeFigureOut">
               <a:rPr lang="en-US" smtClean="0"/>
-              <a:t>5/3/2023</a:t>
+              <a:t>2/8/2025</a:t>
             </a:fld>
             <a:endParaRPr lang="en-US"/>
           </a:p>
@@ -2900,7 +2892,7 @@
           <a:p>
             <a:fld id="{344494C4-6097-4BA9-B81C-8FE8D10E85BA}" type="datetimeFigureOut">
               <a:rPr lang="en-US" smtClean="0"/>
-              <a:t>5/3/2023</a:t>
+              <a:t>2/8/2025</a:t>
             </a:fld>
             <a:endParaRPr lang="en-US"/>
           </a:p>
@@ -3084,7 +3076,7 @@
           <a:p>
             <a:fld id="{344494C4-6097-4BA9-B81C-8FE8D10E85BA}" type="datetimeFigureOut">
               <a:rPr lang="en-US" smtClean="0"/>
-              <a:t>5/3/2023</a:t>
+              <a:t>2/8/2025</a:t>
             </a:fld>
             <a:endParaRPr lang="en-US"/>
           </a:p>
@@ -3278,7 +3270,7 @@
           <a:p>
             <a:fld id="{344494C4-6097-4BA9-B81C-8FE8D10E85BA}" type="datetimeFigureOut">
               <a:rPr lang="en-US" smtClean="0"/>
-              <a:t>5/3/2023</a:t>
+              <a:t>2/8/2025</a:t>
             </a:fld>
             <a:endParaRPr lang="en-US"/>
           </a:p>
@@ -3476,7 +3468,7 @@
           <a:p>
             <a:fld id="{7BF7D500-1223-4445-9EB2-2C72C770F9EB}" type="datetimeFigureOut">
               <a:rPr lang="en-US" smtClean="0"/>
-              <a:t>5/3/2023</a:t>
+              <a:t>2/8/2025</a:t>
             </a:fld>
             <a:endParaRPr lang="en-US"/>
           </a:p>
@@ -3659,7 +3651,7 @@
               <a:pPr>
                 <a:defRPr/>
               </a:pPr>
-              <a:t>5/3/2023</a:t>
+              <a:t>2/8/2025</a:t>
             </a:fld>
             <a:endParaRPr lang="en-US"/>
           </a:p>
@@ -3813,7 +3805,7 @@
           <a:p>
             <a:fld id="{7BF7D500-1223-4445-9EB2-2C72C770F9EB}" type="datetimeFigureOut">
               <a:rPr lang="en-US" smtClean="0"/>
-              <a:t>5/3/2023</a:t>
+              <a:t>2/8/2025</a:t>
             </a:fld>
             <a:endParaRPr lang="en-US"/>
           </a:p>
@@ -4058,7 +4050,7 @@
           <a:p>
             <a:fld id="{7BF7D500-1223-4445-9EB2-2C72C770F9EB}" type="datetimeFigureOut">
               <a:rPr lang="en-US" smtClean="0"/>
-              <a:t>5/3/2023</a:t>
+              <a:t>2/8/2025</a:t>
             </a:fld>
             <a:endParaRPr lang="en-US"/>
           </a:p>
@@ -4287,7 +4279,7 @@
           <a:p>
             <a:fld id="{7BF7D500-1223-4445-9EB2-2C72C770F9EB}" type="datetimeFigureOut">
               <a:rPr lang="en-US" smtClean="0"/>
-              <a:t>5/3/2023</a:t>
+              <a:t>2/8/2025</a:t>
             </a:fld>
             <a:endParaRPr lang="en-US"/>
           </a:p>
@@ -4651,7 +4643,7 @@
           <a:p>
             <a:fld id="{7BF7D500-1223-4445-9EB2-2C72C770F9EB}" type="datetimeFigureOut">
               <a:rPr lang="en-US" smtClean="0"/>
-              <a:t>5/3/2023</a:t>
+              <a:t>2/8/2025</a:t>
             </a:fld>
             <a:endParaRPr lang="en-US"/>
           </a:p>
@@ -4768,7 +4760,7 @@
           <a:p>
             <a:fld id="{7BF7D500-1223-4445-9EB2-2C72C770F9EB}" type="datetimeFigureOut">
               <a:rPr lang="en-US" smtClean="0"/>
-              <a:t>5/3/2023</a:t>
+              <a:t>2/8/2025</a:t>
             </a:fld>
             <a:endParaRPr lang="en-US"/>
           </a:p>
@@ -4863,7 +4855,7 @@
           <a:p>
             <a:fld id="{7BF7D500-1223-4445-9EB2-2C72C770F9EB}" type="datetimeFigureOut">
               <a:rPr lang="en-US" smtClean="0"/>
-              <a:t>5/3/2023</a:t>
+              <a:t>2/8/2025</a:t>
             </a:fld>
             <a:endParaRPr lang="en-US"/>
           </a:p>
@@ -5138,7 +5130,7 @@
           <a:p>
             <a:fld id="{7BF7D500-1223-4445-9EB2-2C72C770F9EB}" type="datetimeFigureOut">
               <a:rPr lang="en-US" smtClean="0"/>
-              <a:t>5/3/2023</a:t>
+              <a:t>2/8/2025</a:t>
             </a:fld>
             <a:endParaRPr lang="en-US"/>
           </a:p>
@@ -5390,7 +5382,7 @@
           <a:p>
             <a:fld id="{7BF7D500-1223-4445-9EB2-2C72C770F9EB}" type="datetimeFigureOut">
               <a:rPr lang="en-US" smtClean="0"/>
-              <a:t>5/3/2023</a:t>
+              <a:t>2/8/2025</a:t>
             </a:fld>
             <a:endParaRPr lang="en-US"/>
           </a:p>
@@ -5558,7 +5550,7 @@
           <a:p>
             <a:fld id="{7BF7D500-1223-4445-9EB2-2C72C770F9EB}" type="datetimeFigureOut">
               <a:rPr lang="en-US" smtClean="0"/>
-              <a:t>5/3/2023</a:t>
+              <a:t>2/8/2025</a:t>
             </a:fld>
             <a:endParaRPr lang="en-US"/>
           </a:p>
@@ -5736,7 +5728,7 @@
           <a:p>
             <a:fld id="{7BF7D500-1223-4445-9EB2-2C72C770F9EB}" type="datetimeFigureOut">
               <a:rPr lang="en-US" smtClean="0"/>
-              <a:t>5/3/2023</a:t>
+              <a:t>2/8/2025</a:t>
             </a:fld>
             <a:endParaRPr lang="en-US"/>
           </a:p>
@@ -5980,7 +5972,7 @@
               <a:pPr>
                 <a:defRPr/>
               </a:pPr>
-              <a:t>5/3/2023</a:t>
+              <a:t>2/8/2025</a:t>
             </a:fld>
             <a:endParaRPr lang="en-US"/>
           </a:p>
@@ -6330,7 +6322,7 @@
               <a:pPr>
                 <a:defRPr/>
               </a:pPr>
-              <a:t>5/3/2023</a:t>
+              <a:t>2/8/2025</a:t>
             </a:fld>
             <a:endParaRPr lang="en-US"/>
           </a:p>
@@ -6494,7 +6486,7 @@
               <a:pPr>
                 <a:defRPr/>
               </a:pPr>
-              <a:t>5/3/2023</a:t>
+              <a:t>2/8/2025</a:t>
             </a:fld>
             <a:endParaRPr lang="en-US"/>
           </a:p>
@@ -6585,7 +6577,7 @@
               <a:pPr>
                 <a:defRPr/>
               </a:pPr>
-              <a:t>5/3/2023</a:t>
+              <a:t>2/8/2025</a:t>
             </a:fld>
             <a:endParaRPr lang="en-US"/>
           </a:p>
@@ -6694,7 +6686,7 @@
               <a:pPr>
                 <a:defRPr/>
               </a:pPr>
-              <a:t>5/3/2023</a:t>
+              <a:t>2/8/2025</a:t>
             </a:fld>
             <a:endParaRPr lang="en-US"/>
           </a:p>
@@ -6879,7 +6871,7 @@
           <a:p>
             <a:fld id="{344494C4-6097-4BA9-B81C-8FE8D10E85BA}" type="datetimeFigureOut">
               <a:rPr lang="en-US" smtClean="0"/>
-              <a:t>5/3/2023</a:t>
+              <a:t>2/8/2025</a:t>
             </a:fld>
             <a:endParaRPr lang="en-US"/>
           </a:p>
@@ -7063,7 +7055,7 @@
           <a:p>
             <a:fld id="{344494C4-6097-4BA9-B81C-8FE8D10E85BA}" type="datetimeFigureOut">
               <a:rPr lang="en-US" smtClean="0"/>
-              <a:t>5/3/2023</a:t>
+              <a:t>2/8/2025</a:t>
             </a:fld>
             <a:endParaRPr lang="en-US"/>
           </a:p>
@@ -7312,7 +7304,7 @@
               <a:pPr>
                 <a:defRPr/>
               </a:pPr>
-              <a:t>5/3/2023</a:t>
+              <a:t>2/8/2025</a:t>
             </a:fld>
             <a:endParaRPr lang="en-US"/>
           </a:p>
@@ -8566,7 +8558,7 @@
           <a:p>
             <a:fld id="{7BF7D500-1223-4445-9EB2-2C72C770F9EB}" type="datetimeFigureOut">
               <a:rPr lang="en-US" smtClean="0"/>
-              <a:t>5/3/2023</a:t>
+              <a:t>2/8/2025</a:t>
             </a:fld>
             <a:endParaRPr lang="en-US"/>
           </a:p>
@@ -12558,8 +12550,8 @@
           </a:p>
         </p:txBody>
       </p:sp>
-      <mc:AlternateContent xmlns:mc="http://schemas.openxmlformats.org/markup-compatibility/2006">
-        <mc:Choice xmlns:a14="http://schemas.microsoft.com/office/drawing/2010/main" Requires="a14">
+      <mc:AlternateContent xmlns:mc="http://schemas.openxmlformats.org/markup-compatibility/2006" xmlns:a14="http://schemas.microsoft.com/office/drawing/2010/main">
+        <mc:Choice Requires="a14">
           <p:sp>
             <p:nvSpPr>
               <p:cNvPr id="3" name="Content Placeholder 2">
@@ -12870,7 +12862,7 @@
             </p:txBody>
           </p:sp>
         </mc:Choice>
-        <mc:Fallback>
+        <mc:Fallback xmlns="">
           <p:sp>
             <p:nvSpPr>
               <p:cNvPr id="3" name="Content Placeholder 2">
@@ -12914,8 +12906,8 @@
           </p:sp>
         </mc:Fallback>
       </mc:AlternateContent>
-      <mc:AlternateContent xmlns:mc="http://schemas.openxmlformats.org/markup-compatibility/2006">
-        <mc:Choice xmlns:a14="http://schemas.microsoft.com/office/drawing/2010/main" Requires="a14">
+      <mc:AlternateContent xmlns:mc="http://schemas.openxmlformats.org/markup-compatibility/2006" xmlns:a14="http://schemas.microsoft.com/office/drawing/2010/main">
+        <mc:Choice Requires="a14">
           <p:sp>
             <p:nvSpPr>
               <p:cNvPr id="4" name="Content Placeholder 2">
@@ -13448,7 +13440,7 @@
             </p:txBody>
           </p:sp>
         </mc:Choice>
-        <mc:Fallback>
+        <mc:Fallback xmlns="">
           <p:sp>
             <p:nvSpPr>
               <p:cNvPr id="4" name="Content Placeholder 2">
@@ -13499,8 +13491,8 @@
           </p:sp>
         </mc:Fallback>
       </mc:AlternateContent>
-      <mc:AlternateContent xmlns:mc="http://schemas.openxmlformats.org/markup-compatibility/2006">
-        <mc:Choice xmlns:a14="http://schemas.microsoft.com/office/drawing/2010/main" Requires="a14">
+      <mc:AlternateContent xmlns:mc="http://schemas.openxmlformats.org/markup-compatibility/2006" xmlns:a14="http://schemas.microsoft.com/office/drawing/2010/main">
+        <mc:Choice Requires="a14">
           <p:sp>
             <p:nvSpPr>
               <p:cNvPr id="5" name="Content Placeholder 2">
@@ -13910,7 +13902,7 @@
             </p:txBody>
           </p:sp>
         </mc:Choice>
-        <mc:Fallback>
+        <mc:Fallback xmlns="">
           <p:sp>
             <p:nvSpPr>
               <p:cNvPr id="5" name="Content Placeholder 2">
@@ -26212,8 +26204,8 @@
           </a:p>
         </p:txBody>
       </p:sp>
-      <mc:AlternateContent xmlns:mc="http://schemas.openxmlformats.org/markup-compatibility/2006" xmlns:a14="http://schemas.microsoft.com/office/drawing/2010/main">
-        <mc:Choice Requires="a14">
+      <mc:AlternateContent xmlns:mc="http://schemas.openxmlformats.org/markup-compatibility/2006">
+        <mc:Choice xmlns:a14="http://schemas.microsoft.com/office/drawing/2010/main" Requires="a14">
           <p:sp>
             <p:nvSpPr>
               <p:cNvPr id="3" name="Content Placeholder 2">
@@ -26233,7 +26225,7 @@
             <p:spPr>
               <a:xfrm>
                 <a:off x="609600" y="1219200"/>
-                <a:ext cx="9601200" cy="2181225"/>
+                <a:ext cx="10668000" cy="2543176"/>
               </a:xfrm>
             </p:spPr>
             <p:txBody>
@@ -26636,9 +26628,50 @@
               </a:p>
               <a:p>
                 <a:pPr lvl="1"/>
-                <a:endParaRPr lang="en-US" altLang="en-US" b="0" i="1" dirty="0">
-                  <a:latin typeface="Cambria Math" panose="02040503050406030204" pitchFamily="18" charset="0"/>
-                </a:endParaRPr>
+                <a:r>
+                  <a:rPr lang="en-US" altLang="en-US" dirty="0"/>
+                  <a:t>In Python, we can allocate a </a:t>
+                </a:r>
+                <a14:m>
+                  <m:oMath xmlns:m="http://schemas.openxmlformats.org/officeDocument/2006/math">
+                    <m:r>
+                      <a:rPr lang="en-US" altLang="en-US" b="0" i="1" smtClean="0">
+                        <a:latin typeface="Cambria Math" panose="02040503050406030204" pitchFamily="18" charset="0"/>
+                      </a:rPr>
+                      <m:t>𝑛</m:t>
+                    </m:r>
+                    <m:r>
+                      <a:rPr lang="en-US" altLang="en-US" b="0" i="1" smtClean="0">
+                        <a:latin typeface="Cambria Math"/>
+                      </a:rPr>
+                      <m:t>×</m:t>
+                    </m:r>
+                    <m:r>
+                      <a:rPr lang="en-US" altLang="en-US" b="0" i="1" smtClean="0">
+                        <a:latin typeface="Cambria Math" panose="02040503050406030204" pitchFamily="18" charset="0"/>
+                      </a:rPr>
+                      <m:t>𝑛</m:t>
+                    </m:r>
+                    <m:r>
+                      <a:rPr lang="en-US" altLang="en-US" b="0" i="1" smtClean="0">
+                        <a:latin typeface="Cambria Math"/>
+                      </a:rPr>
+                      <m:t> </m:t>
+                    </m:r>
+                  </m:oMath>
+                </a14:m>
+                <a:r>
+                  <a:rPr lang="en-US" altLang="en-US" b="0" dirty="0"/>
+                  <a:t>(</a:t>
+                </a:r>
+                <a:r>
+                  <a:rPr lang="en-US" altLang="en-US" b="0" dirty="0" err="1"/>
+                  <a:t>Numpy</a:t>
+                </a:r>
+                <a:r>
+                  <a:rPr lang="en-US" altLang="en-US" b="0" dirty="0"/>
+                  <a:t>) array to represent adjacency matrix</a:t>
+                </a:r>
               </a:p>
               <a:p>
                 <a:pPr marL="0" indent="0">
@@ -26649,7 +26682,7 @@
             </p:txBody>
           </p:sp>
         </mc:Choice>
-        <mc:Fallback xmlns="">
+        <mc:Fallback>
           <p:sp>
             <p:nvSpPr>
               <p:cNvPr id="3" name="Content Placeholder 2">
@@ -26669,12 +26702,12 @@
             <p:spPr>
               <a:xfrm>
                 <a:off x="609600" y="1219200"/>
-                <a:ext cx="9601200" cy="2181225"/>
+                <a:ext cx="10668000" cy="2543176"/>
               </a:xfrm>
               <a:blipFill>
                 <a:blip r:embed="rId2"/>
                 <a:stretch>
-                  <a:fillRect l="-571" t="-2514"/>
+                  <a:fillRect l="-514" t="-2158"/>
                 </a:stretch>
               </a:blipFill>
             </p:spPr>
@@ -26722,7 +26755,7 @@
         </p:blipFill>
         <p:spPr bwMode="auto">
           <a:xfrm>
-            <a:off x="3171826" y="3762376"/>
+            <a:off x="3171826" y="4067175"/>
             <a:ext cx="2695575" cy="2219325"/>
           </a:xfrm>
           <a:prstGeom prst="rect">
@@ -26782,7 +26815,7 @@
         </p:blipFill>
         <p:spPr bwMode="auto">
           <a:xfrm>
-            <a:off x="6172200" y="3457576"/>
+            <a:off x="6172200" y="3762375"/>
             <a:ext cx="2800350" cy="2638425"/>
           </a:xfrm>
           <a:prstGeom prst="rect">
@@ -27588,12 +27621,691 @@
           </a:extLst>
         </p:spPr>
       </p:pic>
+    </p:spTree>
+    <p:extLst>
+      <p:ext uri="{BB962C8B-B14F-4D97-AF65-F5344CB8AC3E}">
+        <p14:creationId xmlns:p14="http://schemas.microsoft.com/office/powerpoint/2010/main" val="110000008"/>
+      </p:ext>
+    </p:extLst>
+  </p:cSld>
+  <p:clrMapOvr>
+    <a:masterClrMapping/>
+  </p:clrMapOvr>
+</p:sld>
+</file>
+
+<file path=ppt/slides/slide29.xml><?xml version="1.0" encoding="utf-8"?>
+<p:sld xmlns:a="http://schemas.openxmlformats.org/drawingml/2006/main" xmlns:r="http://schemas.openxmlformats.org/officeDocument/2006/relationships" xmlns:p="http://schemas.openxmlformats.org/presentationml/2006/main">
+  <p:cSld>
+    <p:spTree>
+      <p:nvGrpSpPr>
+        <p:cNvPr id="1" name="">
+          <a:extLst>
+            <a:ext uri="{FF2B5EF4-FFF2-40B4-BE49-F238E27FC236}">
+              <a16:creationId xmlns:a16="http://schemas.microsoft.com/office/drawing/2014/main" id="{F1FAC07C-866B-FCDC-F4A1-2AB8FEE5B788}"/>
+            </a:ext>
+          </a:extLst>
+        </p:cNvPr>
+        <p:cNvGrpSpPr/>
+        <p:nvPr/>
+      </p:nvGrpSpPr>
+      <p:grpSpPr>
+        <a:xfrm>
+          <a:off x="0" y="0"/>
+          <a:ext cx="0" cy="0"/>
+          <a:chOff x="0" y="0"/>
+          <a:chExt cx="0" cy="0"/>
+        </a:xfrm>
+      </p:grpSpPr>
+      <p:pic>
+        <p:nvPicPr>
+          <p:cNvPr id="7" name="Picture 3">
+            <a:extLst>
+              <a:ext uri="{FF2B5EF4-FFF2-40B4-BE49-F238E27FC236}">
+                <a16:creationId xmlns:a16="http://schemas.microsoft.com/office/drawing/2014/main" id="{2DEAB42B-E653-D0EC-A39B-02E28AF104E9}"/>
+              </a:ext>
+            </a:extLst>
+          </p:cNvPr>
+          <p:cNvPicPr>
+            <a:picLocks noChangeAspect="1" noChangeArrowheads="1"/>
+          </p:cNvPicPr>
+          <p:nvPr/>
+        </p:nvPicPr>
+        <p:blipFill>
+          <a:blip r:embed="rId2">
+            <a:extLst>
+              <a:ext uri="{28A0092B-C50C-407E-A947-70E740481C1C}">
+                <a14:useLocalDpi xmlns:a14="http://schemas.microsoft.com/office/drawing/2010/main" val="0"/>
+              </a:ext>
+            </a:extLst>
+          </a:blip>
+          <a:srcRect/>
+          <a:stretch>
+            <a:fillRect/>
+          </a:stretch>
+        </p:blipFill>
+        <p:spPr bwMode="auto">
+          <a:xfrm>
+            <a:off x="5943600" y="2886076"/>
+            <a:ext cx="2476500" cy="2371725"/>
+          </a:xfrm>
+          <a:prstGeom prst="rect">
+            <a:avLst/>
+          </a:prstGeom>
+          <a:noFill/>
+          <a:ln>
+            <a:noFill/>
+          </a:ln>
+          <a:extLst>
+            <a:ext uri="{909E8E84-426E-40DD-AFC4-6F175D3DCCD1}">
+              <a14:hiddenFill xmlns:a14="http://schemas.microsoft.com/office/drawing/2010/main">
+                <a:solidFill>
+                  <a:schemeClr val="accent1"/>
+                </a:solidFill>
+              </a14:hiddenFill>
+            </a:ext>
+            <a:ext uri="{91240B29-F687-4F45-9708-019B960494DF}">
+              <a14:hiddenLine xmlns:a14="http://schemas.microsoft.com/office/drawing/2010/main" w="9525">
+                <a:solidFill>
+                  <a:schemeClr val="tx1"/>
+                </a:solidFill>
+                <a:miter lim="800000"/>
+                <a:headEnd/>
+                <a:tailEnd/>
+              </a14:hiddenLine>
+            </a:ext>
+          </a:extLst>
+        </p:spPr>
+      </p:pic>
+      <p:sp>
+        <p:nvSpPr>
+          <p:cNvPr id="2" name="Title 1">
+            <a:extLst>
+              <a:ext uri="{FF2B5EF4-FFF2-40B4-BE49-F238E27FC236}">
+                <a16:creationId xmlns:a16="http://schemas.microsoft.com/office/drawing/2014/main" id="{C556E850-7C8C-DDFE-DC78-71BB65E19188}"/>
+              </a:ext>
+            </a:extLst>
+          </p:cNvPr>
+          <p:cNvSpPr>
+            <a:spLocks noGrp="1"/>
+          </p:cNvSpPr>
+          <p:nvPr>
+            <p:ph type="title"/>
+          </p:nvPr>
+        </p:nvSpPr>
+        <p:spPr/>
+        <p:txBody>
+          <a:bodyPr/>
+          <a:lstStyle/>
+          <a:p>
+            <a:r>
+              <a:rPr lang="en-US" dirty="0"/>
+              <a:t>Adjacency matrix representation</a:t>
+            </a:r>
+          </a:p>
+        </p:txBody>
+      </p:sp>
+      <mc:AlternateContent xmlns:mc="http://schemas.openxmlformats.org/markup-compatibility/2006">
+        <mc:Choice xmlns:a14="http://schemas.microsoft.com/office/drawing/2010/main" Requires="a14">
+          <p:sp>
+            <p:nvSpPr>
+              <p:cNvPr id="3" name="Content Placeholder 2">
+                <a:extLst>
+                  <a:ext uri="{FF2B5EF4-FFF2-40B4-BE49-F238E27FC236}">
+                    <a16:creationId xmlns:a16="http://schemas.microsoft.com/office/drawing/2014/main" id="{07029E89-BC67-365A-1FE1-60E69A341F83}"/>
+                  </a:ext>
+                </a:extLst>
+              </p:cNvPr>
+              <p:cNvSpPr>
+                <a:spLocks noGrp="1"/>
+              </p:cNvSpPr>
+              <p:nvPr>
+                <p:ph sz="quarter" idx="1"/>
+              </p:nvPr>
+            </p:nvSpPr>
+            <p:spPr>
+              <a:xfrm>
+                <a:off x="533400" y="1219200"/>
+                <a:ext cx="9677400" cy="2181225"/>
+              </a:xfrm>
+            </p:spPr>
+            <p:txBody>
+              <a:bodyPr/>
+              <a:lstStyle/>
+              <a:p>
+                <a:r>
+                  <a:rPr lang="en-US" dirty="0"/>
+                  <a:t>Assume </a:t>
+                </a:r>
+                <a14:m>
+                  <m:oMath xmlns:m="http://schemas.openxmlformats.org/officeDocument/2006/math">
+                    <m:r>
+                      <a:rPr lang="en-US" b="0" i="1" smtClean="0">
+                        <a:latin typeface="Cambria Math" panose="02040503050406030204" pitchFamily="18" charset="0"/>
+                      </a:rPr>
+                      <m:t>𝑉</m:t>
+                    </m:r>
+                    <m:r>
+                      <a:rPr lang="en-US" b="0" i="1" smtClean="0">
+                        <a:latin typeface="Cambria Math" panose="02040503050406030204" pitchFamily="18" charset="0"/>
+                      </a:rPr>
+                      <m:t>={</m:t>
+                    </m:r>
+                    <m:sSub>
+                      <m:sSubPr>
+                        <m:ctrlPr>
+                          <a:rPr lang="en-US" b="0" i="1" smtClean="0">
+                            <a:latin typeface="Cambria Math" panose="02040503050406030204" pitchFamily="18" charset="0"/>
+                          </a:rPr>
+                        </m:ctrlPr>
+                      </m:sSubPr>
+                      <m:e>
+                        <m:r>
+                          <a:rPr lang="en-US" b="0" i="1" smtClean="0">
+                            <a:latin typeface="Cambria Math" panose="02040503050406030204" pitchFamily="18" charset="0"/>
+                          </a:rPr>
+                          <m:t>𝑣</m:t>
+                        </m:r>
+                      </m:e>
+                      <m:sub>
+                        <m:r>
+                          <a:rPr lang="en-US" b="0" i="1" smtClean="0">
+                            <a:latin typeface="Cambria Math" panose="02040503050406030204" pitchFamily="18" charset="0"/>
+                          </a:rPr>
+                          <m:t>0</m:t>
+                        </m:r>
+                      </m:sub>
+                    </m:sSub>
+                    <m:r>
+                      <a:rPr lang="en-US" b="0" i="1" smtClean="0">
+                        <a:latin typeface="Cambria Math" panose="02040503050406030204" pitchFamily="18" charset="0"/>
+                      </a:rPr>
+                      <m:t>,</m:t>
+                    </m:r>
+                    <m:sSub>
+                      <m:sSubPr>
+                        <m:ctrlPr>
+                          <a:rPr lang="en-US" b="0" i="1" smtClean="0">
+                            <a:latin typeface="Cambria Math" panose="02040503050406030204" pitchFamily="18" charset="0"/>
+                          </a:rPr>
+                        </m:ctrlPr>
+                      </m:sSubPr>
+                      <m:e>
+                        <m:r>
+                          <a:rPr lang="en-US" b="0" i="1" smtClean="0">
+                            <a:latin typeface="Cambria Math" panose="02040503050406030204" pitchFamily="18" charset="0"/>
+                          </a:rPr>
+                          <m:t>𝑣</m:t>
+                        </m:r>
+                      </m:e>
+                      <m:sub>
+                        <m:r>
+                          <a:rPr lang="en-US" b="0" i="1" smtClean="0">
+                            <a:latin typeface="Cambria Math" panose="02040503050406030204" pitchFamily="18" charset="0"/>
+                          </a:rPr>
+                          <m:t>1</m:t>
+                        </m:r>
+                      </m:sub>
+                    </m:sSub>
+                    <m:r>
+                      <a:rPr lang="en-US" b="0" i="1" smtClean="0">
+                        <a:latin typeface="Cambria Math" panose="02040503050406030204" pitchFamily="18" charset="0"/>
+                      </a:rPr>
+                      <m:t>,…, </m:t>
+                    </m:r>
+                    <m:sSub>
+                      <m:sSubPr>
+                        <m:ctrlPr>
+                          <a:rPr lang="en-US" b="0" i="1" smtClean="0">
+                            <a:latin typeface="Cambria Math" panose="02040503050406030204" pitchFamily="18" charset="0"/>
+                          </a:rPr>
+                        </m:ctrlPr>
+                      </m:sSubPr>
+                      <m:e>
+                        <m:r>
+                          <a:rPr lang="en-US" b="0" i="1" smtClean="0">
+                            <a:latin typeface="Cambria Math" panose="02040503050406030204" pitchFamily="18" charset="0"/>
+                          </a:rPr>
+                          <m:t>𝑣</m:t>
+                        </m:r>
+                      </m:e>
+                      <m:sub>
+                        <m:r>
+                          <a:rPr lang="en-US" b="0" i="1" smtClean="0">
+                            <a:latin typeface="Cambria Math" panose="02040503050406030204" pitchFamily="18" charset="0"/>
+                          </a:rPr>
+                          <m:t>𝑛</m:t>
+                        </m:r>
+                        <m:r>
+                          <a:rPr lang="en-US" b="0" i="1" smtClean="0">
+                            <a:latin typeface="Cambria Math" panose="02040503050406030204" pitchFamily="18" charset="0"/>
+                          </a:rPr>
+                          <m:t>−1</m:t>
+                        </m:r>
+                      </m:sub>
+                    </m:sSub>
+                    <m:r>
+                      <a:rPr lang="en-US" b="0" i="1" smtClean="0">
+                        <a:latin typeface="Cambria Math" panose="02040503050406030204" pitchFamily="18" charset="0"/>
+                      </a:rPr>
+                      <m:t>}</m:t>
+                    </m:r>
+                  </m:oMath>
+                </a14:m>
+                <a:r>
+                  <a:rPr lang="en-US" dirty="0"/>
+                  <a:t> with </a:t>
+                </a:r>
+                <a14:m>
+                  <m:oMath xmlns:m="http://schemas.openxmlformats.org/officeDocument/2006/math">
+                    <m:r>
+                      <a:rPr lang="en-US" b="0" i="1" smtClean="0">
+                        <a:latin typeface="Cambria Math" panose="02040503050406030204" pitchFamily="18" charset="0"/>
+                      </a:rPr>
+                      <m:t>𝑛</m:t>
+                    </m:r>
+                    <m:r>
+                      <a:rPr lang="en-US" b="0" i="1" smtClean="0">
+                        <a:latin typeface="Cambria Math" panose="02040503050406030204" pitchFamily="18" charset="0"/>
+                      </a:rPr>
+                      <m:t>=|</m:t>
+                    </m:r>
+                    <m:r>
+                      <a:rPr lang="en-US" b="0" i="1" smtClean="0">
+                        <a:latin typeface="Cambria Math" panose="02040503050406030204" pitchFamily="18" charset="0"/>
+                      </a:rPr>
+                      <m:t>𝑉</m:t>
+                    </m:r>
+                    <m:r>
+                      <a:rPr lang="en-US" b="0" i="1" smtClean="0">
+                        <a:latin typeface="Cambria Math" panose="02040503050406030204" pitchFamily="18" charset="0"/>
+                      </a:rPr>
+                      <m:t>|</m:t>
+                    </m:r>
+                  </m:oMath>
+                </a14:m>
+                <a:r>
+                  <a:rPr lang="en-US" dirty="0"/>
+                  <a:t> </a:t>
+                </a:r>
+              </a:p>
+              <a:p>
+                <a:r>
+                  <a:rPr lang="en-US" dirty="0"/>
+                  <a:t>Adjacency matrix of a graph is a </a:t>
+                </a:r>
+                <a14:m>
+                  <m:oMath xmlns:m="http://schemas.openxmlformats.org/officeDocument/2006/math">
+                    <m:r>
+                      <a:rPr lang="en-US" altLang="en-US" b="0" i="1" smtClean="0">
+                        <a:latin typeface="Cambria Math" panose="02040503050406030204" pitchFamily="18" charset="0"/>
+                      </a:rPr>
+                      <m:t>𝑛</m:t>
+                    </m:r>
+                    <m:r>
+                      <a:rPr lang="en-US" altLang="en-US" b="0" i="1" smtClean="0">
+                        <a:latin typeface="Cambria Math"/>
+                      </a:rPr>
+                      <m:t>×</m:t>
+                    </m:r>
+                    <m:r>
+                      <a:rPr lang="en-US" altLang="en-US" b="0" i="1" smtClean="0">
+                        <a:latin typeface="Cambria Math" panose="02040503050406030204" pitchFamily="18" charset="0"/>
+                      </a:rPr>
+                      <m:t>𝑛</m:t>
+                    </m:r>
+                    <m:r>
+                      <a:rPr lang="en-US" altLang="en-US" b="0" i="1" smtClean="0">
+                        <a:latin typeface="Cambria Math"/>
+                      </a:rPr>
+                      <m:t> </m:t>
+                    </m:r>
+                  </m:oMath>
+                </a14:m>
+                <a:r>
+                  <a:rPr lang="en-US" altLang="en-US" dirty="0"/>
+                  <a:t>matrix </a:t>
+                </a:r>
+                <a14:m>
+                  <m:oMath xmlns:m="http://schemas.openxmlformats.org/officeDocument/2006/math">
+                    <m:r>
+                      <m:rPr>
+                        <m:sty m:val="p"/>
+                      </m:rPr>
+                      <a:rPr lang="en-US" altLang="en-US" i="0" dirty="0" smtClean="0">
+                        <a:solidFill>
+                          <a:srgbClr val="C00000"/>
+                        </a:solidFill>
+                        <a:latin typeface="Cambria Math" panose="02040503050406030204" pitchFamily="18" charset="0"/>
+                      </a:rPr>
+                      <m:t>adj</m:t>
+                    </m:r>
+                    <m:r>
+                      <a:rPr lang="en-US" altLang="en-US" b="0" i="1" smtClean="0">
+                        <a:latin typeface="Cambria Math"/>
+                      </a:rPr>
+                      <m:t> </m:t>
+                    </m:r>
+                  </m:oMath>
+                </a14:m>
+                <a:r>
+                  <a:rPr lang="en-US" altLang="en-US" dirty="0"/>
+                  <a:t> </a:t>
+                </a:r>
+              </a:p>
+              <a:p>
+                <a:pPr lvl="1"/>
+                <a:r>
+                  <a:rPr lang="en-US" altLang="en-US" b="0" dirty="0">
+                    <a:solidFill>
+                      <a:srgbClr val="C00000"/>
+                    </a:solidFill>
+                  </a:rPr>
+                  <a:t>adj</a:t>
+                </a:r>
+                <a14:m>
+                  <m:oMath xmlns:m="http://schemas.openxmlformats.org/officeDocument/2006/math">
+                    <m:d>
+                      <m:dPr>
+                        <m:begChr m:val="["/>
+                        <m:endChr m:val="]"/>
+                        <m:ctrlPr>
+                          <a:rPr lang="en-US" altLang="en-US" b="0" i="1" smtClean="0">
+                            <a:latin typeface="Cambria Math" panose="02040503050406030204" pitchFamily="18" charset="0"/>
+                          </a:rPr>
+                        </m:ctrlPr>
+                      </m:dPr>
+                      <m:e>
+                        <m:r>
+                          <a:rPr lang="en-US" altLang="en-US" b="0" i="1" smtClean="0">
+                            <a:latin typeface="Cambria Math"/>
+                          </a:rPr>
+                          <m:t>𝑖</m:t>
+                        </m:r>
+                        <m:r>
+                          <a:rPr lang="en-US" altLang="en-US" b="0" i="1" smtClean="0">
+                            <a:latin typeface="Cambria Math"/>
+                          </a:rPr>
+                          <m:t>,</m:t>
+                        </m:r>
+                        <m:r>
+                          <a:rPr lang="en-US" altLang="en-US" b="0" i="1" smtClean="0">
+                            <a:latin typeface="Cambria Math"/>
+                          </a:rPr>
+                          <m:t>𝑗</m:t>
+                        </m:r>
+                      </m:e>
+                    </m:d>
+                    <m:r>
+                      <a:rPr lang="en-US" altLang="en-US" b="0" i="1" smtClean="0">
+                        <a:latin typeface="Cambria Math"/>
+                      </a:rPr>
+                      <m:t>=</m:t>
+                    </m:r>
+                  </m:oMath>
+                </a14:m>
+                <a:r>
+                  <a:rPr lang="en-US" altLang="en-US" b="0" i="1" dirty="0">
+                    <a:latin typeface="Cambria Math"/>
+                  </a:rPr>
+                  <a:t> </a:t>
+                </a:r>
+                <a14:m>
+                  <m:oMath xmlns:m="http://schemas.openxmlformats.org/officeDocument/2006/math">
+                    <m:d>
+                      <m:dPr>
+                        <m:begChr m:val="{"/>
+                        <m:endChr m:val=""/>
+                        <m:ctrlPr>
+                          <a:rPr lang="en-US" altLang="en-US" b="0" i="1" dirty="0" smtClean="0">
+                            <a:latin typeface="Cambria Math" panose="02040503050406030204" pitchFamily="18" charset="0"/>
+                          </a:rPr>
+                        </m:ctrlPr>
+                      </m:dPr>
+                      <m:e>
+                        <m:eqArr>
+                          <m:eqArrPr>
+                            <m:ctrlPr>
+                              <a:rPr lang="en-US" altLang="en-US" b="0" i="1" dirty="0" smtClean="0">
+                                <a:latin typeface="Cambria Math" panose="02040503050406030204" pitchFamily="18" charset="0"/>
+                              </a:rPr>
+                            </m:ctrlPr>
+                          </m:eqArrPr>
+                          <m:e>
+                            <m:r>
+                              <a:rPr lang="en-US" altLang="en-US" b="0" i="1" dirty="0" smtClean="0">
+                                <a:latin typeface="Cambria Math" panose="02040503050406030204" pitchFamily="18" charset="0"/>
+                              </a:rPr>
+                              <m:t>1,           </m:t>
+                            </m:r>
+                            <m:d>
+                              <m:dPr>
+                                <m:ctrlPr>
+                                  <a:rPr lang="en-US" altLang="en-US" b="0" i="1" dirty="0" smtClean="0">
+                                    <a:latin typeface="Cambria Math" panose="02040503050406030204" pitchFamily="18" charset="0"/>
+                                  </a:rPr>
+                                </m:ctrlPr>
+                              </m:dPr>
+                              <m:e>
+                                <m:sSub>
+                                  <m:sSubPr>
+                                    <m:ctrlPr>
+                                      <a:rPr lang="en-US" altLang="en-US" b="0" i="1" dirty="0" smtClean="0">
+                                        <a:latin typeface="Cambria Math" panose="02040503050406030204" pitchFamily="18" charset="0"/>
+                                      </a:rPr>
+                                    </m:ctrlPr>
+                                  </m:sSubPr>
+                                  <m:e>
+                                    <m:r>
+                                      <a:rPr lang="en-US" altLang="en-US" b="0" i="1" dirty="0" smtClean="0">
+                                        <a:latin typeface="Cambria Math" panose="02040503050406030204" pitchFamily="18" charset="0"/>
+                                      </a:rPr>
+                                      <m:t>𝑣</m:t>
+                                    </m:r>
+                                  </m:e>
+                                  <m:sub>
+                                    <m:r>
+                                      <a:rPr lang="en-US" altLang="en-US" b="0" i="1" dirty="0" smtClean="0">
+                                        <a:latin typeface="Cambria Math" panose="02040503050406030204" pitchFamily="18" charset="0"/>
+                                      </a:rPr>
+                                      <m:t>𝑖</m:t>
+                                    </m:r>
+                                  </m:sub>
+                                </m:sSub>
+                                <m:r>
+                                  <a:rPr lang="en-US" altLang="en-US" b="0" i="1" dirty="0" smtClean="0">
+                                    <a:latin typeface="Cambria Math" panose="02040503050406030204" pitchFamily="18" charset="0"/>
+                                  </a:rPr>
+                                  <m:t>, </m:t>
+                                </m:r>
+                                <m:sSub>
+                                  <m:sSubPr>
+                                    <m:ctrlPr>
+                                      <a:rPr lang="en-US" altLang="en-US" b="0" i="1" dirty="0" smtClean="0">
+                                        <a:latin typeface="Cambria Math" panose="02040503050406030204" pitchFamily="18" charset="0"/>
+                                      </a:rPr>
+                                    </m:ctrlPr>
+                                  </m:sSubPr>
+                                  <m:e>
+                                    <m:r>
+                                      <a:rPr lang="en-US" altLang="en-US" b="0" i="1" dirty="0" smtClean="0">
+                                        <a:latin typeface="Cambria Math" panose="02040503050406030204" pitchFamily="18" charset="0"/>
+                                      </a:rPr>
+                                      <m:t>𝑣</m:t>
+                                    </m:r>
+                                  </m:e>
+                                  <m:sub>
+                                    <m:r>
+                                      <a:rPr lang="en-US" altLang="en-US" b="0" i="1" dirty="0" smtClean="0">
+                                        <a:latin typeface="Cambria Math" panose="02040503050406030204" pitchFamily="18" charset="0"/>
+                                      </a:rPr>
+                                      <m:t>𝑗</m:t>
+                                    </m:r>
+                                  </m:sub>
+                                </m:sSub>
+                              </m:e>
+                            </m:d>
+                            <m:r>
+                              <a:rPr lang="en-US" altLang="en-US" b="0" i="1" dirty="0" smtClean="0">
+                                <a:latin typeface="Cambria Math" panose="02040503050406030204" pitchFamily="18" charset="0"/>
+                              </a:rPr>
+                              <m:t>∈</m:t>
+                            </m:r>
+                            <m:r>
+                              <a:rPr lang="en-US" altLang="en-US" b="0" i="1" dirty="0" smtClean="0">
+                                <a:latin typeface="Cambria Math" panose="02040503050406030204" pitchFamily="18" charset="0"/>
+                              </a:rPr>
+                              <m:t>𝐸</m:t>
+                            </m:r>
+                          </m:e>
+                          <m:e>
+                            <m:r>
+                              <a:rPr lang="en-US" altLang="en-US" b="0" i="1" dirty="0" smtClean="0">
+                                <a:latin typeface="Cambria Math" panose="02040503050406030204" pitchFamily="18" charset="0"/>
+                              </a:rPr>
+                              <m:t>&amp;0,            </m:t>
+                            </m:r>
+                            <m:r>
+                              <a:rPr lang="en-US" altLang="en-US" b="0" i="1" dirty="0" smtClean="0">
+                                <a:latin typeface="Cambria Math" panose="02040503050406030204" pitchFamily="18" charset="0"/>
+                              </a:rPr>
+                              <m:t>𝑜𝑡h𝑒𝑟𝑤𝑖𝑠𝑒</m:t>
+                            </m:r>
+                          </m:e>
+                        </m:eqArr>
+                      </m:e>
+                    </m:d>
+                  </m:oMath>
+                </a14:m>
+                <a:endParaRPr lang="en-US" altLang="en-US" b="0" i="1" dirty="0">
+                  <a:latin typeface="Cambria Math"/>
+                </a:endParaRPr>
+              </a:p>
+              <a:p>
+                <a:pPr lvl="1"/>
+                <a:endParaRPr lang="en-US" altLang="en-US" b="0" i="1" dirty="0">
+                  <a:latin typeface="Cambria Math" panose="02040503050406030204" pitchFamily="18" charset="0"/>
+                </a:endParaRPr>
+              </a:p>
+              <a:p>
+                <a:pPr marL="0" indent="0">
+                  <a:buNone/>
+                </a:pPr>
+                <a:endParaRPr lang="en-US" dirty="0"/>
+              </a:p>
+            </p:txBody>
+          </p:sp>
+        </mc:Choice>
+        <mc:Fallback>
+          <p:sp>
+            <p:nvSpPr>
+              <p:cNvPr id="3" name="Content Placeholder 2">
+                <a:extLst>
+                  <a:ext uri="{FF2B5EF4-FFF2-40B4-BE49-F238E27FC236}">
+                    <a16:creationId xmlns:a16="http://schemas.microsoft.com/office/drawing/2014/main" id="{07029E89-BC67-365A-1FE1-60E69A341F83}"/>
+                  </a:ext>
+                </a:extLst>
+              </p:cNvPr>
+              <p:cNvSpPr>
+                <a:spLocks noGrp="1" noRot="1" noChangeAspect="1" noMove="1" noResize="1" noEditPoints="1" noAdjustHandles="1" noChangeArrowheads="1" noChangeShapeType="1" noTextEdit="1"/>
+              </p:cNvSpPr>
+              <p:nvPr>
+                <p:ph sz="quarter" idx="1"/>
+              </p:nvPr>
+            </p:nvSpPr>
+            <p:spPr>
+              <a:xfrm>
+                <a:off x="533400" y="1219200"/>
+                <a:ext cx="9677400" cy="2181225"/>
+              </a:xfrm>
+              <a:blipFill>
+                <a:blip r:embed="rId3"/>
+                <a:stretch>
+                  <a:fillRect l="-567" t="-2514"/>
+                </a:stretch>
+              </a:blipFill>
+            </p:spPr>
+            <p:txBody>
+              <a:bodyPr/>
+              <a:lstStyle/>
+              <a:p>
+                <a:r>
+                  <a:rPr lang="en-US">
+                    <a:noFill/>
+                  </a:rPr>
+                  <a:t> </a:t>
+                </a:r>
+              </a:p>
+            </p:txBody>
+          </p:sp>
+        </mc:Fallback>
+      </mc:AlternateContent>
+      <p:pic>
+        <p:nvPicPr>
+          <p:cNvPr id="6" name="Picture 2">
+            <a:extLst>
+              <a:ext uri="{FF2B5EF4-FFF2-40B4-BE49-F238E27FC236}">
+                <a16:creationId xmlns:a16="http://schemas.microsoft.com/office/drawing/2014/main" id="{44BAF640-DB16-77D4-DEA6-58F26BC0EAAB}"/>
+              </a:ext>
+            </a:extLst>
+          </p:cNvPr>
+          <p:cNvPicPr>
+            <a:picLocks noChangeAspect="1" noChangeArrowheads="1"/>
+          </p:cNvPicPr>
+          <p:nvPr/>
+        </p:nvPicPr>
+        <p:blipFill>
+          <a:blip r:embed="rId4">
+            <a:extLst>
+              <a:ext uri="{28A0092B-C50C-407E-A947-70E740481C1C}">
+                <a14:useLocalDpi xmlns:a14="http://schemas.microsoft.com/office/drawing/2010/main" val="0"/>
+              </a:ext>
+            </a:extLst>
+          </a:blip>
+          <a:srcRect/>
+          <a:stretch>
+            <a:fillRect/>
+          </a:stretch>
+        </p:blipFill>
+        <p:spPr bwMode="auto">
+          <a:xfrm>
+            <a:off x="3048000" y="3124201"/>
+            <a:ext cx="2343150" cy="1990725"/>
+          </a:xfrm>
+          <a:prstGeom prst="rect">
+            <a:avLst/>
+          </a:prstGeom>
+          <a:noFill/>
+          <a:ln>
+            <a:noFill/>
+          </a:ln>
+          <a:extLst>
+            <a:ext uri="{909E8E84-426E-40DD-AFC4-6F175D3DCCD1}">
+              <a14:hiddenFill xmlns:a14="http://schemas.microsoft.com/office/drawing/2010/main">
+                <a:solidFill>
+                  <a:schemeClr val="accent1"/>
+                </a:solidFill>
+              </a14:hiddenFill>
+            </a:ext>
+            <a:ext uri="{91240B29-F687-4F45-9708-019B960494DF}">
+              <a14:hiddenLine xmlns:a14="http://schemas.microsoft.com/office/drawing/2010/main" w="9525">
+                <a:solidFill>
+                  <a:schemeClr val="tx1"/>
+                </a:solidFill>
+                <a:miter lim="800000"/>
+                <a:headEnd/>
+                <a:tailEnd/>
+              </a14:hiddenLine>
+            </a:ext>
+          </a:extLst>
+        </p:spPr>
+      </p:pic>
       <p:sp>
         <p:nvSpPr>
           <p:cNvPr id="8" name="TextBox 7">
             <a:extLst>
               <a:ext uri="{FF2B5EF4-FFF2-40B4-BE49-F238E27FC236}">
-                <a16:creationId xmlns:a16="http://schemas.microsoft.com/office/drawing/2014/main" id="{57F96D4D-B20D-4B21-83CD-D501ADA1BAC6}"/>
+                <a16:creationId xmlns:a16="http://schemas.microsoft.com/office/drawing/2014/main" id="{50A4DA1E-064F-479B-B141-E4766136FB6C}"/>
               </a:ext>
             </a:extLst>
           </p:cNvPr>
@@ -27651,7 +28363,222 @@
     </p:spTree>
     <p:extLst>
       <p:ext uri="{BB962C8B-B14F-4D97-AF65-F5344CB8AC3E}">
-        <p14:creationId xmlns:p14="http://schemas.microsoft.com/office/powerpoint/2010/main" val="110000008"/>
+        <p14:creationId xmlns:p14="http://schemas.microsoft.com/office/powerpoint/2010/main" val="3298287779"/>
+      </p:ext>
+    </p:extLst>
+  </p:cSld>
+  <p:clrMapOvr>
+    <a:masterClrMapping/>
+  </p:clrMapOvr>
+</p:sld>
+</file>
+
+<file path=ppt/slides/slide3.xml><?xml version="1.0" encoding="utf-8"?>
+<p:sld xmlns:a="http://schemas.openxmlformats.org/drawingml/2006/main" xmlns:r="http://schemas.openxmlformats.org/officeDocument/2006/relationships" xmlns:p="http://schemas.openxmlformats.org/presentationml/2006/main">
+  <p:cSld>
+    <p:spTree>
+      <p:nvGrpSpPr>
+        <p:cNvPr id="1" name=""/>
+        <p:cNvGrpSpPr/>
+        <p:nvPr/>
+      </p:nvGrpSpPr>
+      <p:grpSpPr>
+        <a:xfrm>
+          <a:off x="0" y="0"/>
+          <a:ext cx="0" cy="0"/>
+          <a:chOff x="0" y="0"/>
+          <a:chExt cx="0" cy="0"/>
+        </a:xfrm>
+      </p:grpSpPr>
+      <p:sp>
+        <p:nvSpPr>
+          <p:cNvPr id="2" name="Title 1">
+            <a:extLst>
+              <a:ext uri="{FF2B5EF4-FFF2-40B4-BE49-F238E27FC236}">
+                <a16:creationId xmlns:a16="http://schemas.microsoft.com/office/drawing/2014/main" id="{603F6649-5A64-45D6-A6CA-8E8A3A6B0CDE}"/>
+              </a:ext>
+            </a:extLst>
+          </p:cNvPr>
+          <p:cNvSpPr>
+            <a:spLocks noGrp="1"/>
+          </p:cNvSpPr>
+          <p:nvPr>
+            <p:ph type="title"/>
+          </p:nvPr>
+        </p:nvSpPr>
+        <p:spPr/>
+        <p:txBody>
+          <a:bodyPr/>
+          <a:lstStyle/>
+          <a:p>
+            <a:r>
+              <a:rPr lang="en-US" dirty="0"/>
+              <a:t>Common data types </a:t>
+            </a:r>
+          </a:p>
+        </p:txBody>
+      </p:sp>
+      <mc:AlternateContent xmlns:mc="http://schemas.openxmlformats.org/markup-compatibility/2006" xmlns:a14="http://schemas.microsoft.com/office/drawing/2010/main">
+        <mc:Choice Requires="a14">
+          <p:sp>
+            <p:nvSpPr>
+              <p:cNvPr id="3" name="Content Placeholder 2">
+                <a:extLst>
+                  <a:ext uri="{FF2B5EF4-FFF2-40B4-BE49-F238E27FC236}">
+                    <a16:creationId xmlns:a16="http://schemas.microsoft.com/office/drawing/2014/main" id="{1C494781-9569-4BCE-B3A3-2C8EB0F996BF}"/>
+                  </a:ext>
+                </a:extLst>
+              </p:cNvPr>
+              <p:cNvSpPr>
+                <a:spLocks noGrp="1"/>
+              </p:cNvSpPr>
+              <p:nvPr>
+                <p:ph sz="quarter" idx="1"/>
+              </p:nvPr>
+            </p:nvSpPr>
+            <p:spPr/>
+            <p:txBody>
+              <a:bodyPr/>
+              <a:lstStyle/>
+              <a:p>
+                <a:r>
+                  <a:rPr lang="en-US" dirty="0"/>
+                  <a:t>A set of feature vectors in some feature space (</a:t>
+                </a:r>
+                <a:r>
+                  <a:rPr lang="en-US" dirty="0" err="1"/>
+                  <a:t>e.g</a:t>
+                </a:r>
+                <a:r>
+                  <a:rPr lang="en-US" dirty="0"/>
+                  <a:t>, </a:t>
+                </a:r>
+                <a14:m>
+                  <m:oMath xmlns:m="http://schemas.openxmlformats.org/officeDocument/2006/math">
+                    <m:sSup>
+                      <m:sSupPr>
+                        <m:ctrlPr>
+                          <a:rPr lang="en-US" b="0" i="1" smtClean="0">
+                            <a:latin typeface="Cambria Math" panose="02040503050406030204" pitchFamily="18" charset="0"/>
+                          </a:rPr>
+                        </m:ctrlPr>
+                      </m:sSupPr>
+                      <m:e>
+                        <m:r>
+                          <a:rPr lang="en-US" b="0" i="1" smtClean="0">
+                            <a:latin typeface="Cambria Math" panose="02040503050406030204" pitchFamily="18" charset="0"/>
+                          </a:rPr>
+                          <m:t>𝑅</m:t>
+                        </m:r>
+                      </m:e>
+                      <m:sup>
+                        <m:r>
+                          <a:rPr lang="en-US" b="0" i="1" smtClean="0">
+                            <a:latin typeface="Cambria Math" panose="02040503050406030204" pitchFamily="18" charset="0"/>
+                          </a:rPr>
+                          <m:t>𝑑</m:t>
+                        </m:r>
+                      </m:sup>
+                    </m:sSup>
+                  </m:oMath>
+                </a14:m>
+                <a:r>
+                  <a:rPr lang="en-US" dirty="0"/>
+                  <a:t>) </a:t>
+                </a:r>
+              </a:p>
+              <a:p>
+                <a:pPr lvl="1"/>
+                <a:r>
+                  <a:rPr lang="en-US" dirty="0"/>
+                  <a:t>A collection of patients’ record, each represented by a feature vector containing information such as name, age, health history etc. </a:t>
+                </a:r>
+              </a:p>
+              <a:p>
+                <a:pPr lvl="1"/>
+                <a:r>
+                  <a:rPr lang="en-US" dirty="0"/>
+                  <a:t>Focus on attributes of individuals </a:t>
+                </a:r>
+              </a:p>
+              <a:p>
+                <a:pPr lvl="1"/>
+                <a:endParaRPr lang="en-US" dirty="0"/>
+              </a:p>
+              <a:p>
+                <a:r>
+                  <a:rPr lang="en-US" dirty="0"/>
+                  <a:t>Graph data: </a:t>
+                </a:r>
+              </a:p>
+              <a:p>
+                <a:pPr lvl="1"/>
+                <a:r>
+                  <a:rPr lang="en-US" dirty="0"/>
+                  <a:t>Focus on (pairwise) relations among individuals </a:t>
+                </a:r>
+              </a:p>
+              <a:p>
+                <a:pPr lvl="1"/>
+                <a:r>
+                  <a:rPr lang="en-US" dirty="0"/>
+                  <a:t>Social networks, co-authorship networks, knowledge graphs </a:t>
+                </a:r>
+              </a:p>
+              <a:p>
+                <a:pPr lvl="1"/>
+                <a:endParaRPr lang="en-US" dirty="0"/>
+              </a:p>
+              <a:p>
+                <a:endParaRPr lang="en-US" dirty="0"/>
+              </a:p>
+            </p:txBody>
+          </p:sp>
+        </mc:Choice>
+        <mc:Fallback xmlns="">
+          <p:sp>
+            <p:nvSpPr>
+              <p:cNvPr id="3" name="Content Placeholder 2">
+                <a:extLst>
+                  <a:ext uri="{FF2B5EF4-FFF2-40B4-BE49-F238E27FC236}">
+                    <a16:creationId xmlns:a16="http://schemas.microsoft.com/office/drawing/2014/main" id="{1C494781-9569-4BCE-B3A3-2C8EB0F996BF}"/>
+                  </a:ext>
+                </a:extLst>
+              </p:cNvPr>
+              <p:cNvSpPr>
+                <a:spLocks noGrp="1" noRot="1" noChangeAspect="1" noMove="1" noResize="1" noEditPoints="1" noAdjustHandles="1" noChangeArrowheads="1" noChangeShapeType="1" noTextEdit="1"/>
+              </p:cNvSpPr>
+              <p:nvPr>
+                <p:ph sz="quarter" idx="1"/>
+              </p:nvPr>
+            </p:nvSpPr>
+            <p:spPr>
+              <a:blipFill>
+                <a:blip r:embed="rId2"/>
+                <a:stretch>
+                  <a:fillRect l="-667" t="-988" r="-1111"/>
+                </a:stretch>
+              </a:blipFill>
+            </p:spPr>
+            <p:txBody>
+              <a:bodyPr/>
+              <a:lstStyle/>
+              <a:p>
+                <a:r>
+                  <a:rPr lang="en-US">
+                    <a:noFill/>
+                  </a:rPr>
+                  <a:t> </a:t>
+                </a:r>
+              </a:p>
+            </p:txBody>
+          </p:sp>
+        </mc:Fallback>
+      </mc:AlternateContent>
+    </p:spTree>
+    <p:extLst>
+      <p:ext uri="{BB962C8B-B14F-4D97-AF65-F5344CB8AC3E}">
+        <p14:creationId xmlns:p14="http://schemas.microsoft.com/office/powerpoint/2010/main" val="2750505869"/>
       </p:ext>
     </p:extLst>
   </p:cSld>
@@ -27679,7 +28606,7 @@
                             </p:stCondLst>
                             <p:childTnLst>
                               <p:par>
-                                <p:cTn id="5" presetID="1" presetClass="entr" presetSubtype="0" fill="hold" grpId="0" nodeType="clickEffect">
+                                <p:cTn id="5" presetID="1" presetClass="entr" presetSubtype="0" fill="hold" nodeType="clickEffect">
                                   <p:stCondLst>
                                     <p:cond delay="0"/>
                                   </p:stCondLst>
@@ -27692,7 +28619,73 @@
                                           </p:stCondLst>
                                         </p:cTn>
                                         <p:tgtEl>
-                                          <p:spTgt spid="8"/>
+                                          <p:spTgt spid="3">
+                                            <p:txEl>
+                                              <p:pRg st="4" end="4"/>
+                                            </p:txEl>
+                                          </p:spTgt>
+                                        </p:tgtEl>
+                                        <p:attrNameLst>
+                                          <p:attrName>style.visibility</p:attrName>
+                                        </p:attrNameLst>
+                                      </p:cBhvr>
+                                      <p:to>
+                                        <p:strVal val="visible"/>
+                                      </p:to>
+                                    </p:set>
+                                  </p:childTnLst>
+                                </p:cTn>
+                              </p:par>
+                              <p:par>
+                                <p:cTn id="7" presetID="1" presetClass="entr" presetSubtype="0" fill="hold" nodeType="withEffect">
+                                  <p:stCondLst>
+                                    <p:cond delay="0"/>
+                                  </p:stCondLst>
+                                  <p:childTnLst>
+                                    <p:set>
+                                      <p:cBhvr>
+                                        <p:cTn id="8" dur="1" fill="hold">
+                                          <p:stCondLst>
+                                            <p:cond delay="0"/>
+                                          </p:stCondLst>
+                                        </p:cTn>
+                                        <p:tgtEl>
+                                          <p:spTgt spid="3">
+                                            <p:txEl>
+                                              <p:pRg st="5" end="5"/>
+                                            </p:txEl>
+                                          </p:spTgt>
+                                        </p:tgtEl>
+                                        <p:attrNameLst>
+                                          <p:attrName>style.visibility</p:attrName>
+                                        </p:attrNameLst>
+                                      </p:cBhvr>
+                                      <p:to>
+                                        <p:strVal val="visible"/>
+                                      </p:to>
+                                    </p:set>
+                                  </p:childTnLst>
+                                </p:cTn>
+                              </p:par>
+                              <p:par>
+                                <p:cTn id="9" presetID="1" presetClass="entr" presetSubtype="0" fill="hold" nodeType="withEffect">
+                                  <p:stCondLst>
+                                    <p:cond delay="0"/>
+                                  </p:stCondLst>
+                                  <p:childTnLst>
+                                    <p:set>
+                                      <p:cBhvr>
+                                        <p:cTn id="10" dur="1" fill="hold">
+                                          <p:stCondLst>
+                                            <p:cond delay="0"/>
+                                          </p:stCondLst>
+                                        </p:cTn>
+                                        <p:tgtEl>
+                                          <p:spTgt spid="3">
+                                            <p:txEl>
+                                              <p:pRg st="6" end="6"/>
+                                            </p:txEl>
+                                          </p:spTgt>
                                         </p:tgtEl>
                                         <p:attrNameLst>
                                           <p:attrName>style.visibility</p:attrName>
@@ -27732,14 +28725,11 @@
         </p:cTn>
       </p:par>
     </p:tnLst>
-    <p:bldLst>
-      <p:bldP spid="8" grpId="0" animBg="1"/>
-    </p:bldLst>
   </p:timing>
 </p:sld>
 </file>
 
-<file path=ppt/slides/slide29.xml><?xml version="1.0" encoding="utf-8"?>
+<file path=ppt/slides/slide30.xml><?xml version="1.0" encoding="utf-8"?>
 <p:sld xmlns:a="http://schemas.openxmlformats.org/drawingml/2006/main" xmlns:r="http://schemas.openxmlformats.org/officeDocument/2006/relationships" xmlns:p="http://schemas.openxmlformats.org/presentationml/2006/main">
   <p:cSld>
     <p:spTree>
@@ -28147,12 +29137,740 @@
           </p:sp>
         </mc:Fallback>
       </mc:AlternateContent>
+    </p:spTree>
+    <p:extLst>
+      <p:ext uri="{BB962C8B-B14F-4D97-AF65-F5344CB8AC3E}">
+        <p14:creationId xmlns:p14="http://schemas.microsoft.com/office/powerpoint/2010/main" val="1692715179"/>
+      </p:ext>
+    </p:extLst>
+  </p:cSld>
+  <p:clrMapOvr>
+    <a:masterClrMapping/>
+  </p:clrMapOvr>
+  <p:timing>
+    <p:tnLst>
+      <p:par>
+        <p:cTn id="1" dur="indefinite" restart="never" nodeType="tmRoot">
+          <p:childTnLst>
+            <p:seq concurrent="1" nextAc="seek">
+              <p:cTn id="2" dur="indefinite" nodeType="mainSeq">
+                <p:childTnLst>
+                  <p:par>
+                    <p:cTn id="3" fill="hold">
+                      <p:stCondLst>
+                        <p:cond delay="indefinite"/>
+                      </p:stCondLst>
+                      <p:childTnLst>
+                        <p:par>
+                          <p:cTn id="4" fill="hold">
+                            <p:stCondLst>
+                              <p:cond delay="0"/>
+                            </p:stCondLst>
+                            <p:childTnLst>
+                              <p:par>
+                                <p:cTn id="5" presetID="1" presetClass="entr" presetSubtype="0" fill="hold" nodeType="clickEffect">
+                                  <p:stCondLst>
+                                    <p:cond delay="0"/>
+                                  </p:stCondLst>
+                                  <p:childTnLst>
+                                    <p:set>
+                                      <p:cBhvr>
+                                        <p:cTn id="6" dur="1" fill="hold">
+                                          <p:stCondLst>
+                                            <p:cond delay="0"/>
+                                          </p:stCondLst>
+                                        </p:cTn>
+                                        <p:tgtEl>
+                                          <p:spTgt spid="3">
+                                            <p:txEl>
+                                              <p:pRg st="0" end="0"/>
+                                            </p:txEl>
+                                          </p:spTgt>
+                                        </p:tgtEl>
+                                        <p:attrNameLst>
+                                          <p:attrName>style.visibility</p:attrName>
+                                        </p:attrNameLst>
+                                      </p:cBhvr>
+                                      <p:to>
+                                        <p:strVal val="visible"/>
+                                      </p:to>
+                                    </p:set>
+                                  </p:childTnLst>
+                                </p:cTn>
+                              </p:par>
+                              <p:par>
+                                <p:cTn id="7" presetID="1" presetClass="entr" presetSubtype="0" fill="hold" nodeType="withEffect">
+                                  <p:stCondLst>
+                                    <p:cond delay="0"/>
+                                  </p:stCondLst>
+                                  <p:childTnLst>
+                                    <p:set>
+                                      <p:cBhvr>
+                                        <p:cTn id="8" dur="1" fill="hold">
+                                          <p:stCondLst>
+                                            <p:cond delay="0"/>
+                                          </p:stCondLst>
+                                        </p:cTn>
+                                        <p:tgtEl>
+                                          <p:spTgt spid="3">
+                                            <p:txEl>
+                                              <p:pRg st="1" end="1"/>
+                                            </p:txEl>
+                                          </p:spTgt>
+                                        </p:tgtEl>
+                                        <p:attrNameLst>
+                                          <p:attrName>style.visibility</p:attrName>
+                                        </p:attrNameLst>
+                                      </p:cBhvr>
+                                      <p:to>
+                                        <p:strVal val="visible"/>
+                                      </p:to>
+                                    </p:set>
+                                  </p:childTnLst>
+                                </p:cTn>
+                              </p:par>
+                            </p:childTnLst>
+                          </p:cTn>
+                        </p:par>
+                      </p:childTnLst>
+                    </p:cTn>
+                  </p:par>
+                  <p:par>
+                    <p:cTn id="9" fill="hold">
+                      <p:stCondLst>
+                        <p:cond delay="indefinite"/>
+                      </p:stCondLst>
+                      <p:childTnLst>
+                        <p:par>
+                          <p:cTn id="10" fill="hold">
+                            <p:stCondLst>
+                              <p:cond delay="0"/>
+                            </p:stCondLst>
+                            <p:childTnLst>
+                              <p:par>
+                                <p:cTn id="11" presetID="1" presetClass="entr" presetSubtype="0" fill="hold" nodeType="clickEffect">
+                                  <p:stCondLst>
+                                    <p:cond delay="0"/>
+                                  </p:stCondLst>
+                                  <p:childTnLst>
+                                    <p:set>
+                                      <p:cBhvr>
+                                        <p:cTn id="12" dur="1" fill="hold">
+                                          <p:stCondLst>
+                                            <p:cond delay="0"/>
+                                          </p:stCondLst>
+                                        </p:cTn>
+                                        <p:tgtEl>
+                                          <p:spTgt spid="3">
+                                            <p:txEl>
+                                              <p:pRg st="3" end="3"/>
+                                            </p:txEl>
+                                          </p:spTgt>
+                                        </p:tgtEl>
+                                        <p:attrNameLst>
+                                          <p:attrName>style.visibility</p:attrName>
+                                        </p:attrNameLst>
+                                      </p:cBhvr>
+                                      <p:to>
+                                        <p:strVal val="visible"/>
+                                      </p:to>
+                                    </p:set>
+                                  </p:childTnLst>
+                                </p:cTn>
+                              </p:par>
+                              <p:par>
+                                <p:cTn id="13" presetID="1" presetClass="entr" presetSubtype="0" fill="hold" nodeType="withEffect">
+                                  <p:stCondLst>
+                                    <p:cond delay="0"/>
+                                  </p:stCondLst>
+                                  <p:childTnLst>
+                                    <p:set>
+                                      <p:cBhvr>
+                                        <p:cTn id="14" dur="1" fill="hold">
+                                          <p:stCondLst>
+                                            <p:cond delay="0"/>
+                                          </p:stCondLst>
+                                        </p:cTn>
+                                        <p:tgtEl>
+                                          <p:spTgt spid="3">
+                                            <p:txEl>
+                                              <p:pRg st="4" end="4"/>
+                                            </p:txEl>
+                                          </p:spTgt>
+                                        </p:tgtEl>
+                                        <p:attrNameLst>
+                                          <p:attrName>style.visibility</p:attrName>
+                                        </p:attrNameLst>
+                                      </p:cBhvr>
+                                      <p:to>
+                                        <p:strVal val="visible"/>
+                                      </p:to>
+                                    </p:set>
+                                  </p:childTnLst>
+                                </p:cTn>
+                              </p:par>
+                              <p:par>
+                                <p:cTn id="15" presetID="1" presetClass="entr" presetSubtype="0" fill="hold" nodeType="withEffect">
+                                  <p:stCondLst>
+                                    <p:cond delay="0"/>
+                                  </p:stCondLst>
+                                  <p:childTnLst>
+                                    <p:set>
+                                      <p:cBhvr>
+                                        <p:cTn id="16" dur="1" fill="hold">
+                                          <p:stCondLst>
+                                            <p:cond delay="0"/>
+                                          </p:stCondLst>
+                                        </p:cTn>
+                                        <p:tgtEl>
+                                          <p:spTgt spid="3">
+                                            <p:txEl>
+                                              <p:pRg st="5" end="5"/>
+                                            </p:txEl>
+                                          </p:spTgt>
+                                        </p:tgtEl>
+                                        <p:attrNameLst>
+                                          <p:attrName>style.visibility</p:attrName>
+                                        </p:attrNameLst>
+                                      </p:cBhvr>
+                                      <p:to>
+                                        <p:strVal val="visible"/>
+                                      </p:to>
+                                    </p:set>
+                                  </p:childTnLst>
+                                </p:cTn>
+                              </p:par>
+                            </p:childTnLst>
+                          </p:cTn>
+                        </p:par>
+                      </p:childTnLst>
+                    </p:cTn>
+                  </p:par>
+                  <p:par>
+                    <p:cTn id="17" fill="hold">
+                      <p:stCondLst>
+                        <p:cond delay="indefinite"/>
+                      </p:stCondLst>
+                      <p:childTnLst>
+                        <p:par>
+                          <p:cTn id="18" fill="hold">
+                            <p:stCondLst>
+                              <p:cond delay="0"/>
+                            </p:stCondLst>
+                            <p:childTnLst>
+                              <p:par>
+                                <p:cTn id="19" presetID="1" presetClass="entr" presetSubtype="0" fill="hold" nodeType="clickEffect">
+                                  <p:stCondLst>
+                                    <p:cond delay="0"/>
+                                  </p:stCondLst>
+                                  <p:childTnLst>
+                                    <p:set>
+                                      <p:cBhvr>
+                                        <p:cTn id="20" dur="1" fill="hold">
+                                          <p:stCondLst>
+                                            <p:cond delay="0"/>
+                                          </p:stCondLst>
+                                        </p:cTn>
+                                        <p:tgtEl>
+                                          <p:spTgt spid="3">
+                                            <p:txEl>
+                                              <p:pRg st="6" end="6"/>
+                                            </p:txEl>
+                                          </p:spTgt>
+                                        </p:tgtEl>
+                                        <p:attrNameLst>
+                                          <p:attrName>style.visibility</p:attrName>
+                                        </p:attrNameLst>
+                                      </p:cBhvr>
+                                      <p:to>
+                                        <p:strVal val="visible"/>
+                                      </p:to>
+                                    </p:set>
+                                  </p:childTnLst>
+                                </p:cTn>
+                              </p:par>
+                              <p:par>
+                                <p:cTn id="21" presetID="1" presetClass="entr" presetSubtype="0" fill="hold" nodeType="withEffect">
+                                  <p:stCondLst>
+                                    <p:cond delay="0"/>
+                                  </p:stCondLst>
+                                  <p:childTnLst>
+                                    <p:set>
+                                      <p:cBhvr>
+                                        <p:cTn id="22" dur="1" fill="hold">
+                                          <p:stCondLst>
+                                            <p:cond delay="0"/>
+                                          </p:stCondLst>
+                                        </p:cTn>
+                                        <p:tgtEl>
+                                          <p:spTgt spid="3">
+                                            <p:txEl>
+                                              <p:pRg st="7" end="7"/>
+                                            </p:txEl>
+                                          </p:spTgt>
+                                        </p:tgtEl>
+                                        <p:attrNameLst>
+                                          <p:attrName>style.visibility</p:attrName>
+                                        </p:attrNameLst>
+                                      </p:cBhvr>
+                                      <p:to>
+                                        <p:strVal val="visible"/>
+                                      </p:to>
+                                    </p:set>
+                                  </p:childTnLst>
+                                </p:cTn>
+                              </p:par>
+                            </p:childTnLst>
+                          </p:cTn>
+                        </p:par>
+                      </p:childTnLst>
+                    </p:cTn>
+                  </p:par>
+                </p:childTnLst>
+              </p:cTn>
+              <p:prevCondLst>
+                <p:cond evt="onPrev" delay="0">
+                  <p:tgtEl>
+                    <p:sldTgt/>
+                  </p:tgtEl>
+                </p:cond>
+              </p:prevCondLst>
+              <p:nextCondLst>
+                <p:cond evt="onNext" delay="0">
+                  <p:tgtEl>
+                    <p:sldTgt/>
+                  </p:tgtEl>
+                </p:cond>
+              </p:nextCondLst>
+            </p:seq>
+          </p:childTnLst>
+        </p:cTn>
+      </p:par>
+    </p:tnLst>
+  </p:timing>
+</p:sld>
+</file>
+
+<file path=ppt/slides/slide31.xml><?xml version="1.0" encoding="utf-8"?>
+<p:sld xmlns:a="http://schemas.openxmlformats.org/drawingml/2006/main" xmlns:r="http://schemas.openxmlformats.org/officeDocument/2006/relationships" xmlns:p="http://schemas.openxmlformats.org/presentationml/2006/main">
+  <p:cSld>
+    <p:spTree>
+      <p:nvGrpSpPr>
+        <p:cNvPr id="1" name="">
+          <a:extLst>
+            <a:ext uri="{FF2B5EF4-FFF2-40B4-BE49-F238E27FC236}">
+              <a16:creationId xmlns:a16="http://schemas.microsoft.com/office/drawing/2014/main" id="{6E6D3CAC-EC3B-76C3-525F-FA46AC7BD260}"/>
+            </a:ext>
+          </a:extLst>
+        </p:cNvPr>
+        <p:cNvGrpSpPr/>
+        <p:nvPr/>
+      </p:nvGrpSpPr>
+      <p:grpSpPr>
+        <a:xfrm>
+          <a:off x="0" y="0"/>
+          <a:ext cx="0" cy="0"/>
+          <a:chOff x="0" y="0"/>
+          <a:chExt cx="0" cy="0"/>
+        </a:xfrm>
+      </p:grpSpPr>
+      <p:sp>
+        <p:nvSpPr>
+          <p:cNvPr id="2" name="Title 1">
+            <a:extLst>
+              <a:ext uri="{FF2B5EF4-FFF2-40B4-BE49-F238E27FC236}">
+                <a16:creationId xmlns:a16="http://schemas.microsoft.com/office/drawing/2014/main" id="{AE96906F-D879-34CE-02A4-084D91055206}"/>
+              </a:ext>
+            </a:extLst>
+          </p:cNvPr>
+          <p:cNvSpPr>
+            <a:spLocks noGrp="1"/>
+          </p:cNvSpPr>
+          <p:nvPr>
+            <p:ph type="title"/>
+          </p:nvPr>
+        </p:nvSpPr>
+        <p:spPr/>
+        <p:txBody>
+          <a:bodyPr/>
+          <a:lstStyle/>
+          <a:p>
+            <a:r>
+              <a:rPr lang="en-US" dirty="0"/>
+              <a:t>Complexity</a:t>
+            </a:r>
+          </a:p>
+        </p:txBody>
+      </p:sp>
+      <mc:AlternateContent xmlns:mc="http://schemas.openxmlformats.org/markup-compatibility/2006">
+        <mc:Choice xmlns:a14="http://schemas.microsoft.com/office/drawing/2010/main" Requires="a14">
+          <p:sp>
+            <p:nvSpPr>
+              <p:cNvPr id="3" name="Content Placeholder 2">
+                <a:extLst>
+                  <a:ext uri="{FF2B5EF4-FFF2-40B4-BE49-F238E27FC236}">
+                    <a16:creationId xmlns:a16="http://schemas.microsoft.com/office/drawing/2014/main" id="{4152F0EE-DFCB-3774-75D9-AA249A73F2DF}"/>
+                  </a:ext>
+                </a:extLst>
+              </p:cNvPr>
+              <p:cNvSpPr>
+                <a:spLocks noGrp="1"/>
+              </p:cNvSpPr>
+              <p:nvPr>
+                <p:ph sz="quarter" idx="1"/>
+              </p:nvPr>
+            </p:nvSpPr>
+            <p:spPr>
+              <a:xfrm>
+                <a:off x="609600" y="1219200"/>
+                <a:ext cx="9582807" cy="4937760"/>
+              </a:xfrm>
+            </p:spPr>
+            <p:txBody>
+              <a:bodyPr/>
+              <a:lstStyle/>
+              <a:p>
+                <a:r>
+                  <a:rPr lang="en-US" dirty="0"/>
+                  <a:t>Size of Adjacency matrix </a:t>
+                </a:r>
+              </a:p>
+              <a:p>
+                <a:pPr lvl="1"/>
+                <a14:m>
+                  <m:oMath xmlns:m="http://schemas.openxmlformats.org/officeDocument/2006/math">
+                    <m:r>
+                      <m:rPr>
+                        <m:sty m:val="p"/>
+                      </m:rPr>
+                      <a:rPr lang="en-US" b="0" i="0" smtClean="0">
+                        <a:latin typeface="Cambria Math" panose="02040503050406030204" pitchFamily="18" charset="0"/>
+                      </a:rPr>
+                      <m:t>Θ</m:t>
+                    </m:r>
+                    <m:d>
+                      <m:dPr>
+                        <m:ctrlPr>
+                          <a:rPr lang="en-US" b="0" i="1" smtClean="0">
+                            <a:latin typeface="Cambria Math" panose="02040503050406030204" pitchFamily="18" charset="0"/>
+                          </a:rPr>
+                        </m:ctrlPr>
+                      </m:dPr>
+                      <m:e>
+                        <m:sSup>
+                          <m:sSupPr>
+                            <m:ctrlPr>
+                              <a:rPr lang="en-US" b="0" i="1" smtClean="0">
+                                <a:latin typeface="Cambria Math" panose="02040503050406030204" pitchFamily="18" charset="0"/>
+                              </a:rPr>
+                            </m:ctrlPr>
+                          </m:sSupPr>
+                          <m:e>
+                            <m:r>
+                              <a:rPr lang="en-US" b="0" i="1" smtClean="0">
+                                <a:latin typeface="Cambria Math" panose="02040503050406030204" pitchFamily="18" charset="0"/>
+                              </a:rPr>
+                              <m:t>|</m:t>
+                            </m:r>
+                            <m:r>
+                              <a:rPr lang="en-US" b="0" i="1" smtClean="0">
+                                <a:latin typeface="Cambria Math" panose="02040503050406030204" pitchFamily="18" charset="0"/>
+                              </a:rPr>
+                              <m:t>𝑉</m:t>
+                            </m:r>
+                            <m:r>
+                              <a:rPr lang="en-US" b="0" i="1" smtClean="0">
+                                <a:latin typeface="Cambria Math" panose="02040503050406030204" pitchFamily="18" charset="0"/>
+                              </a:rPr>
+                              <m:t>|</m:t>
+                            </m:r>
+                          </m:e>
+                          <m:sup>
+                            <m:r>
+                              <a:rPr lang="en-US" b="0" i="1" smtClean="0">
+                                <a:latin typeface="Cambria Math" panose="02040503050406030204" pitchFamily="18" charset="0"/>
+                              </a:rPr>
+                              <m:t>2</m:t>
+                            </m:r>
+                          </m:sup>
+                        </m:sSup>
+                      </m:e>
+                    </m:d>
+                  </m:oMath>
+                </a14:m>
+                <a:endParaRPr lang="en-US" dirty="0"/>
+              </a:p>
+              <a:p>
+                <a:pPr lvl="1"/>
+                <a:endParaRPr lang="en-US" sz="600" dirty="0"/>
+              </a:p>
+              <a:p>
+                <a:r>
+                  <a:rPr lang="en-US" dirty="0"/>
+                  <a:t>Time complexity of operations</a:t>
+                </a:r>
+              </a:p>
+              <a:p>
+                <a:pPr lvl="1"/>
+                <a:r>
+                  <a:rPr lang="en-US" dirty="0"/>
+                  <a:t>Edge query:  </a:t>
+                </a:r>
+              </a:p>
+              <a:p>
+                <a:pPr lvl="2"/>
+                <a:r>
+                  <a:rPr lang="en-US" dirty="0"/>
+                  <a:t>is the edge </a:t>
+                </a:r>
+                <a14:m>
+                  <m:oMath xmlns:m="http://schemas.openxmlformats.org/officeDocument/2006/math">
+                    <m:d>
+                      <m:dPr>
+                        <m:ctrlPr>
+                          <a:rPr lang="en-US" b="0" i="1" smtClean="0">
+                            <a:latin typeface="Cambria Math" panose="02040503050406030204" pitchFamily="18" charset="0"/>
+                          </a:rPr>
+                        </m:ctrlPr>
+                      </m:dPr>
+                      <m:e>
+                        <m:sSub>
+                          <m:sSubPr>
+                            <m:ctrlPr>
+                              <a:rPr lang="en-US" b="0" i="1" smtClean="0">
+                                <a:latin typeface="Cambria Math" panose="02040503050406030204" pitchFamily="18" charset="0"/>
+                              </a:rPr>
+                            </m:ctrlPr>
+                          </m:sSubPr>
+                          <m:e>
+                            <m:r>
+                              <a:rPr lang="en-US" b="0" i="1" smtClean="0">
+                                <a:latin typeface="Cambria Math" panose="02040503050406030204" pitchFamily="18" charset="0"/>
+                              </a:rPr>
+                              <m:t>𝑣</m:t>
+                            </m:r>
+                          </m:e>
+                          <m:sub>
+                            <m:r>
+                              <a:rPr lang="en-US" b="0" i="1" smtClean="0">
+                                <a:latin typeface="Cambria Math" panose="02040503050406030204" pitchFamily="18" charset="0"/>
+                              </a:rPr>
+                              <m:t>𝑖</m:t>
+                            </m:r>
+                          </m:sub>
+                        </m:sSub>
+                        <m:r>
+                          <a:rPr lang="en-US" b="0" i="1" smtClean="0">
+                            <a:latin typeface="Cambria Math" panose="02040503050406030204" pitchFamily="18" charset="0"/>
+                          </a:rPr>
+                          <m:t>, </m:t>
+                        </m:r>
+                        <m:sSub>
+                          <m:sSubPr>
+                            <m:ctrlPr>
+                              <a:rPr lang="en-US" b="0" i="1" smtClean="0">
+                                <a:latin typeface="Cambria Math" panose="02040503050406030204" pitchFamily="18" charset="0"/>
+                              </a:rPr>
+                            </m:ctrlPr>
+                          </m:sSubPr>
+                          <m:e>
+                            <m:r>
+                              <a:rPr lang="en-US" b="0" i="1" smtClean="0">
+                                <a:latin typeface="Cambria Math" panose="02040503050406030204" pitchFamily="18" charset="0"/>
+                              </a:rPr>
+                              <m:t>𝑣</m:t>
+                            </m:r>
+                          </m:e>
+                          <m:sub>
+                            <m:r>
+                              <a:rPr lang="en-US" b="0" i="1" smtClean="0">
+                                <a:latin typeface="Cambria Math" panose="02040503050406030204" pitchFamily="18" charset="0"/>
+                              </a:rPr>
+                              <m:t>𝑗</m:t>
+                            </m:r>
+                          </m:sub>
+                        </m:sSub>
+                      </m:e>
+                    </m:d>
+                    <m:r>
+                      <a:rPr lang="en-US" b="0" i="1" smtClean="0">
+                        <a:latin typeface="Cambria Math" panose="02040503050406030204" pitchFamily="18" charset="0"/>
+                      </a:rPr>
+                      <m:t>∈</m:t>
+                    </m:r>
+                    <m:r>
+                      <a:rPr lang="en-US" b="0" i="1" smtClean="0">
+                        <a:latin typeface="Cambria Math" panose="02040503050406030204" pitchFamily="18" charset="0"/>
+                      </a:rPr>
+                      <m:t>𝐸</m:t>
+                    </m:r>
+                    <m:r>
+                      <a:rPr lang="en-US" b="0" i="1" smtClean="0">
+                        <a:latin typeface="Cambria Math" panose="02040503050406030204" pitchFamily="18" charset="0"/>
+                      </a:rPr>
+                      <m:t> ? </m:t>
+                    </m:r>
+                  </m:oMath>
+                </a14:m>
+                <a:endParaRPr lang="en-US" dirty="0"/>
+              </a:p>
+              <a:p>
+                <a:pPr lvl="1"/>
+                <a:r>
+                  <a:rPr lang="en-US" dirty="0"/>
+                  <a:t>Degree query: </a:t>
+                </a:r>
+              </a:p>
+              <a:p>
+                <a:pPr lvl="2"/>
+                <a:r>
+                  <a:rPr lang="en-US" dirty="0"/>
+                  <a:t>what is the </a:t>
+                </a:r>
+                <a:r>
+                  <a:rPr lang="en-US" dirty="0">
+                    <a:solidFill>
+                      <a:srgbClr val="700000"/>
+                    </a:solidFill>
+                  </a:rPr>
+                  <a:t>degree</a:t>
+                </a:r>
+                <a:r>
+                  <a:rPr lang="en-US" dirty="0"/>
+                  <a:t> of </a:t>
+                </a:r>
+                <a14:m>
+                  <m:oMath xmlns:m="http://schemas.openxmlformats.org/officeDocument/2006/math">
+                    <m:sSub>
+                      <m:sSubPr>
+                        <m:ctrlPr>
+                          <a:rPr lang="en-US" i="1">
+                            <a:latin typeface="Cambria Math" panose="02040503050406030204" pitchFamily="18" charset="0"/>
+                          </a:rPr>
+                        </m:ctrlPr>
+                      </m:sSubPr>
+                      <m:e>
+                        <m:r>
+                          <a:rPr lang="en-US" i="1">
+                            <a:latin typeface="Cambria Math" panose="02040503050406030204" pitchFamily="18" charset="0"/>
+                          </a:rPr>
+                          <m:t>𝑣</m:t>
+                        </m:r>
+                      </m:e>
+                      <m:sub>
+                        <m:r>
+                          <a:rPr lang="en-US" i="1">
+                            <a:latin typeface="Cambria Math" panose="02040503050406030204" pitchFamily="18" charset="0"/>
+                          </a:rPr>
+                          <m:t>𝑖</m:t>
+                        </m:r>
+                      </m:sub>
+                    </m:sSub>
+                  </m:oMath>
+                </a14:m>
+                <a:r>
+                  <a:rPr lang="en-US" dirty="0"/>
+                  <a:t> (in undirected graph), or what is the </a:t>
+                </a:r>
+                <a:r>
+                  <a:rPr lang="en-US" dirty="0">
+                    <a:solidFill>
+                      <a:srgbClr val="700000"/>
+                    </a:solidFill>
+                  </a:rPr>
+                  <a:t>outdegree</a:t>
+                </a:r>
+                <a:r>
+                  <a:rPr lang="en-US" dirty="0"/>
+                  <a:t> of </a:t>
+                </a:r>
+                <a14:m>
+                  <m:oMath xmlns:m="http://schemas.openxmlformats.org/officeDocument/2006/math">
+                    <m:sSub>
+                      <m:sSubPr>
+                        <m:ctrlPr>
+                          <a:rPr lang="en-US" i="1">
+                            <a:latin typeface="Cambria Math" panose="02040503050406030204" pitchFamily="18" charset="0"/>
+                          </a:rPr>
+                        </m:ctrlPr>
+                      </m:sSubPr>
+                      <m:e>
+                        <m:r>
+                          <a:rPr lang="en-US" i="1">
+                            <a:latin typeface="Cambria Math" panose="02040503050406030204" pitchFamily="18" charset="0"/>
+                          </a:rPr>
+                          <m:t>𝑣</m:t>
+                        </m:r>
+                      </m:e>
+                      <m:sub>
+                        <m:r>
+                          <a:rPr lang="en-US" i="1">
+                            <a:latin typeface="Cambria Math" panose="02040503050406030204" pitchFamily="18" charset="0"/>
+                          </a:rPr>
+                          <m:t>𝑖</m:t>
+                        </m:r>
+                      </m:sub>
+                    </m:sSub>
+                  </m:oMath>
+                </a14:m>
+                <a:r>
+                  <a:rPr lang="en-US" dirty="0"/>
+                  <a:t> (in directed graph)</a:t>
+                </a:r>
+              </a:p>
+            </p:txBody>
+          </p:sp>
+        </mc:Choice>
+        <mc:Fallback>
+          <p:sp>
+            <p:nvSpPr>
+              <p:cNvPr id="3" name="Content Placeholder 2">
+                <a:extLst>
+                  <a:ext uri="{FF2B5EF4-FFF2-40B4-BE49-F238E27FC236}">
+                    <a16:creationId xmlns:a16="http://schemas.microsoft.com/office/drawing/2014/main" id="{4152F0EE-DFCB-3774-75D9-AA249A73F2DF}"/>
+                  </a:ext>
+                </a:extLst>
+              </p:cNvPr>
+              <p:cNvSpPr>
+                <a:spLocks noGrp="1" noRot="1" noChangeAspect="1" noMove="1" noResize="1" noEditPoints="1" noAdjustHandles="1" noChangeArrowheads="1" noChangeShapeType="1" noTextEdit="1"/>
+              </p:cNvSpPr>
+              <p:nvPr>
+                <p:ph sz="quarter" idx="1"/>
+              </p:nvPr>
+            </p:nvSpPr>
+            <p:spPr>
+              <a:xfrm>
+                <a:off x="609600" y="1219200"/>
+                <a:ext cx="9582807" cy="4937760"/>
+              </a:xfrm>
+              <a:blipFill>
+                <a:blip r:embed="rId2"/>
+                <a:stretch>
+                  <a:fillRect l="-573" t="-1111"/>
+                </a:stretch>
+              </a:blipFill>
+            </p:spPr>
+            <p:txBody>
+              <a:bodyPr/>
+              <a:lstStyle/>
+              <a:p>
+                <a:r>
+                  <a:rPr lang="en-US">
+                    <a:noFill/>
+                  </a:rPr>
+                  <a:t> </a:t>
+                </a:r>
+              </a:p>
+            </p:txBody>
+          </p:sp>
+        </mc:Fallback>
+      </mc:AlternateContent>
       <p:grpSp>
         <p:nvGrpSpPr>
           <p:cNvPr id="7" name="Group 6">
             <a:extLst>
               <a:ext uri="{FF2B5EF4-FFF2-40B4-BE49-F238E27FC236}">
-                <a16:creationId xmlns:a16="http://schemas.microsoft.com/office/drawing/2014/main" id="{858B792F-BF40-4BBA-9FAC-FD9EF633A49D}"/>
+                <a16:creationId xmlns:a16="http://schemas.microsoft.com/office/drawing/2014/main" id="{1911A593-93B4-B741-B1B2-9D4844985941}"/>
               </a:ext>
             </a:extLst>
           </p:cNvPr>
@@ -28172,7 +29890,7 @@
             <p:cNvPr id="5" name="Picture 4">
               <a:extLst>
                 <a:ext uri="{FF2B5EF4-FFF2-40B4-BE49-F238E27FC236}">
-                  <a16:creationId xmlns:a16="http://schemas.microsoft.com/office/drawing/2014/main" id="{581EEF12-6AB2-485B-8565-F2CEE90467FA}"/>
+                  <a16:creationId xmlns:a16="http://schemas.microsoft.com/office/drawing/2014/main" id="{A1C65C7D-F1CC-2E56-8367-85AFD2F758AA}"/>
                 </a:ext>
               </a:extLst>
             </p:cNvPr>
@@ -28202,7 +29920,7 @@
             <p:cNvPr id="6" name="Rectangle 5">
               <a:extLst>
                 <a:ext uri="{FF2B5EF4-FFF2-40B4-BE49-F238E27FC236}">
-                  <a16:creationId xmlns:a16="http://schemas.microsoft.com/office/drawing/2014/main" id="{69080351-D09F-467C-B925-D4849C60A252}"/>
+                  <a16:creationId xmlns:a16="http://schemas.microsoft.com/office/drawing/2014/main" id="{FC5EAE7B-6835-2256-17EF-3334FA9C3893}"/>
                 </a:ext>
               </a:extLst>
             </p:cNvPr>
@@ -28253,7 +29971,7 @@
     </p:spTree>
     <p:extLst>
       <p:ext uri="{BB962C8B-B14F-4D97-AF65-F5344CB8AC3E}">
-        <p14:creationId xmlns:p14="http://schemas.microsoft.com/office/powerpoint/2010/main" val="1692715179"/>
+        <p14:creationId xmlns:p14="http://schemas.microsoft.com/office/powerpoint/2010/main" val="512096322"/>
       </p:ext>
     </p:extLst>
   </p:cSld>
@@ -28609,7 +30327,7 @@
 </p:sld>
 </file>
 
-<file path=ppt/slides/slide3.xml><?xml version="1.0" encoding="utf-8"?>
+<file path=ppt/slides/slide32.xml><?xml version="1.0" encoding="utf-8"?>
 <p:sld xmlns:a="http://schemas.openxmlformats.org/drawingml/2006/main" xmlns:r="http://schemas.openxmlformats.org/officeDocument/2006/relationships" xmlns:p="http://schemas.openxmlformats.org/presentationml/2006/main">
   <p:cSld>
     <p:spTree>
@@ -28631,7 +30349,7 @@
           <p:cNvPr id="2" name="Title 1">
             <a:extLst>
               <a:ext uri="{FF2B5EF4-FFF2-40B4-BE49-F238E27FC236}">
-                <a16:creationId xmlns:a16="http://schemas.microsoft.com/office/drawing/2014/main" id="{603F6649-5A64-45D6-A6CA-8E8A3A6B0CDE}"/>
+                <a16:creationId xmlns:a16="http://schemas.microsoft.com/office/drawing/2014/main" id="{05299F4E-C479-46A6-90CC-2B2ED88D35C1}"/>
               </a:ext>
             </a:extLst>
           </p:cNvPr>
@@ -28649,19 +30367,19 @@
           <a:p>
             <a:r>
               <a:rPr lang="en-US" dirty="0"/>
-              <a:t>Common data types </a:t>
+              <a:t>Remarks</a:t>
             </a:r>
           </a:p>
         </p:txBody>
       </p:sp>
-      <mc:AlternateContent xmlns:mc="http://schemas.openxmlformats.org/markup-compatibility/2006" xmlns:a14="http://schemas.microsoft.com/office/drawing/2010/main">
-        <mc:Choice Requires="a14">
+      <mc:AlternateContent xmlns:mc="http://schemas.openxmlformats.org/markup-compatibility/2006">
+        <mc:Choice xmlns:a14="http://schemas.microsoft.com/office/drawing/2010/main" Requires="a14">
           <p:sp>
             <p:nvSpPr>
               <p:cNvPr id="3" name="Content Placeholder 2">
                 <a:extLst>
                   <a:ext uri="{FF2B5EF4-FFF2-40B4-BE49-F238E27FC236}">
-                    <a16:creationId xmlns:a16="http://schemas.microsoft.com/office/drawing/2014/main" id="{1C494781-9569-4BCE-B3A3-2C8EB0F996BF}"/>
+                    <a16:creationId xmlns:a16="http://schemas.microsoft.com/office/drawing/2014/main" id="{E8259036-E6B6-4582-94B9-C55BB4940051}"/>
                   </a:ext>
                 </a:extLst>
               </p:cNvPr>
@@ -28672,22 +30390,140 @@
                 <p:ph sz="quarter" idx="1"/>
               </p:nvPr>
             </p:nvSpPr>
-            <p:spPr/>
+            <p:spPr>
+              <a:xfrm>
+                <a:off x="609600" y="1143000"/>
+                <a:ext cx="10896600" cy="4937760"/>
+              </a:xfrm>
+            </p:spPr>
             <p:txBody>
               <a:bodyPr/>
               <a:lstStyle/>
               <a:p>
                 <a:r>
                   <a:rPr lang="en-US" dirty="0"/>
-                  <a:t>A set of feature vectors in some feature space (</a:t>
-                </a:r>
+                  <a:t>Pros: </a:t>
+                </a:r>
+              </a:p>
+              <a:p>
+                <a:pPr lvl="1"/>
+                <a:r>
+                  <a:rPr lang="en-US" dirty="0"/>
+                  <a:t>Support very efficient edge queries </a:t>
+                </a:r>
+              </a:p>
+              <a:p>
+                <a:pPr lvl="1"/>
+                <a:r>
+                  <a:rPr lang="en-US" dirty="0"/>
+                  <a:t>Simple and easy to use</a:t>
+                </a:r>
+              </a:p>
+              <a:p>
+                <a:pPr lvl="2"/>
+                <a:r>
+                  <a:rPr lang="en-US" dirty="0"/>
+                  <a:t>only need to allocate a </a:t>
+                </a:r>
+                <a14:m>
+                  <m:oMath xmlns:m="http://schemas.openxmlformats.org/officeDocument/2006/math">
+                    <m:d>
+                      <m:dPr>
+                        <m:begChr m:val="|"/>
+                        <m:endChr m:val="|"/>
+                        <m:ctrlPr>
+                          <a:rPr lang="en-US" b="0" i="1" smtClean="0">
+                            <a:latin typeface="Cambria Math" panose="02040503050406030204" pitchFamily="18" charset="0"/>
+                          </a:rPr>
+                        </m:ctrlPr>
+                      </m:dPr>
+                      <m:e>
+                        <m:r>
+                          <a:rPr lang="en-US" b="0" i="1" smtClean="0">
+                            <a:latin typeface="Cambria Math" panose="02040503050406030204" pitchFamily="18" charset="0"/>
+                          </a:rPr>
+                          <m:t>𝑉</m:t>
+                        </m:r>
+                      </m:e>
+                    </m:d>
+                    <m:r>
+                      <a:rPr lang="en-US" b="0" i="1" smtClean="0">
+                        <a:latin typeface="Cambria Math" panose="02040503050406030204" pitchFamily="18" charset="0"/>
+                      </a:rPr>
+                      <m:t>×</m:t>
+                    </m:r>
+                    <m:d>
+                      <m:dPr>
+                        <m:begChr m:val="|"/>
+                        <m:endChr m:val="|"/>
+                        <m:ctrlPr>
+                          <a:rPr lang="en-US" b="0" i="1" smtClean="0">
+                            <a:latin typeface="Cambria Math" panose="02040503050406030204" pitchFamily="18" charset="0"/>
+                          </a:rPr>
+                        </m:ctrlPr>
+                      </m:dPr>
+                      <m:e>
+                        <m:r>
+                          <a:rPr lang="en-US" b="0" i="1" smtClean="0">
+                            <a:latin typeface="Cambria Math" panose="02040503050406030204" pitchFamily="18" charset="0"/>
+                          </a:rPr>
+                          <m:t>𝑉</m:t>
+                        </m:r>
+                      </m:e>
+                    </m:d>
+                    <m:r>
+                      <a:rPr lang="en-US" b="0" i="1" smtClean="0">
+                        <a:latin typeface="Cambria Math" panose="02040503050406030204" pitchFamily="18" charset="0"/>
+                      </a:rPr>
+                      <m:t> </m:t>
+                    </m:r>
+                  </m:oMath>
+                </a14:m>
+                <a:r>
+                  <a:rPr lang="en-US" dirty="0"/>
+                  <a:t>(</a:t>
+                </a:r>
+                <a:r>
+                  <a:rPr lang="en-US" dirty="0" err="1"/>
+                  <a:t>Numpy</a:t>
+                </a:r>
+                <a:r>
+                  <a:rPr lang="en-US" dirty="0"/>
+                  <a:t>) array</a:t>
+                </a:r>
+              </a:p>
+              <a:p>
+                <a:pPr lvl="1"/>
+                <a:r>
+                  <a:rPr lang="en-US" dirty="0"/>
+                  <a:t>Easy to manipulate via linear algebra</a:t>
+                </a:r>
+              </a:p>
+              <a:p>
+                <a:pPr lvl="2"/>
                 <a:r>
                   <a:rPr lang="en-US" dirty="0" err="1"/>
                   <a:t>e.g</a:t>
                 </a:r>
                 <a:r>
                   <a:rPr lang="en-US" dirty="0"/>
-                  <a:t>, </a:t>
+                  <a:t>, (</a:t>
+                </a:r>
+                <a:r>
+                  <a:rPr lang="en-US" dirty="0" err="1"/>
+                  <a:t>i,j</a:t>
+                </a:r>
+                <a:r>
+                  <a:rPr lang="en-US" dirty="0"/>
+                  <a:t>)-</a:t>
+                </a:r>
+                <a:r>
+                  <a:rPr lang="en-US" dirty="0" err="1"/>
+                  <a:t>th</a:t>
+                </a:r>
+                <a:r>
+                  <a:rPr lang="en-US" dirty="0"/>
+                  <a:t> entry of </a:t>
                 </a:r>
                 <a14:m>
                   <m:oMath xmlns:m="http://schemas.openxmlformats.org/officeDocument/2006/math">
@@ -28704,7 +30540,7 @@
                           <a:rPr lang="en-US" b="0" i="1" smtClean="0">
                             <a:latin typeface="Cambria Math" panose="02040503050406030204" pitchFamily="18" charset="0"/>
                           </a:rPr>
-                          <m:t>𝑅</m:t>
+                          <m:t>𝐴</m:t>
                         </m:r>
                       </m:e>
                       <m:sup>
@@ -28712,7 +30548,7 @@
                           <a:rPr lang="en-US" b="0" i="1" smtClean="0">
                             <a:latin typeface="Cambria Math" panose="02040503050406030204" pitchFamily="18" charset="0"/>
                           </a:rPr>
-                          <m:t>𝑑</m:t>
+                          <m:t>2</m:t>
                         </m:r>
                       </m:sup>
                     </m:sSup>
@@ -28720,50 +30556,80 @@
                 </a14:m>
                 <a:r>
                   <a:rPr lang="en-US" dirty="0"/>
-                  <a:t>) </a:t>
+                  <a:t> gives number of hops of length 2 between </a:t>
+                </a:r>
+                <a14:m>
+                  <m:oMath xmlns:m="http://schemas.openxmlformats.org/officeDocument/2006/math">
+                    <m:sSub>
+                      <m:sSubPr>
+                        <m:ctrlPr>
+                          <a:rPr lang="en-US" b="0" i="1" smtClean="0">
+                            <a:latin typeface="Cambria Math" panose="02040503050406030204" pitchFamily="18" charset="0"/>
+                          </a:rPr>
+                        </m:ctrlPr>
+                      </m:sSubPr>
+                      <m:e>
+                        <m:r>
+                          <a:rPr lang="en-US" b="0" i="1" smtClean="0">
+                            <a:latin typeface="Cambria Math" panose="02040503050406030204" pitchFamily="18" charset="0"/>
+                          </a:rPr>
+                          <m:t>𝑣</m:t>
+                        </m:r>
+                      </m:e>
+                      <m:sub>
+                        <m:r>
+                          <a:rPr lang="en-US" b="0" i="1" smtClean="0">
+                            <a:latin typeface="Cambria Math" panose="02040503050406030204" pitchFamily="18" charset="0"/>
+                          </a:rPr>
+                          <m:t>𝑖</m:t>
+                        </m:r>
+                      </m:sub>
+                    </m:sSub>
+                  </m:oMath>
+                </a14:m>
+                <a:r>
+                  <a:rPr lang="en-US" dirty="0"/>
+                  <a:t> and </a:t>
+                </a:r>
+                <a14:m>
+                  <m:oMath xmlns:m="http://schemas.openxmlformats.org/officeDocument/2006/math">
+                    <m:sSub>
+                      <m:sSubPr>
+                        <m:ctrlPr>
+                          <a:rPr lang="en-US" b="0" i="1" smtClean="0">
+                            <a:latin typeface="Cambria Math" panose="02040503050406030204" pitchFamily="18" charset="0"/>
+                          </a:rPr>
+                        </m:ctrlPr>
+                      </m:sSubPr>
+                      <m:e>
+                        <m:r>
+                          <a:rPr lang="en-US" b="0" i="1" smtClean="0">
+                            <a:latin typeface="Cambria Math" panose="02040503050406030204" pitchFamily="18" charset="0"/>
+                          </a:rPr>
+                          <m:t>𝑣</m:t>
+                        </m:r>
+                      </m:e>
+                      <m:sub>
+                        <m:r>
+                          <a:rPr lang="en-US" b="0" i="1" smtClean="0">
+                            <a:latin typeface="Cambria Math" panose="02040503050406030204" pitchFamily="18" charset="0"/>
+                          </a:rPr>
+                          <m:t>𝑗</m:t>
+                        </m:r>
+                      </m:sub>
+                    </m:sSub>
+                  </m:oMath>
+                </a14:m>
+                <a:r>
+                  <a:rPr lang="en-US" dirty="0"/>
+                  <a:t>  </a:t>
                 </a:r>
               </a:p>
               <a:p>
                 <a:pPr lvl="1"/>
-                <a:r>
-                  <a:rPr lang="en-US" dirty="0"/>
-                  <a:t>A collection of patients’ record, each represented by a feature vector containing information such as name, age, health history etc. </a:t>
-                </a:r>
-              </a:p>
-              <a:p>
-                <a:pPr lvl="1"/>
-                <a:r>
-                  <a:rPr lang="en-US" dirty="0"/>
-                  <a:t>Focus on attributes of individuals </a:t>
-                </a:r>
-              </a:p>
-              <a:p>
-                <a:pPr lvl="1"/>
-                <a:endParaRPr lang="en-US" dirty="0"/>
-              </a:p>
-              <a:p>
-                <a:r>
-                  <a:rPr lang="en-US" dirty="0"/>
-                  <a:t>Graph data: </a:t>
-                </a:r>
-              </a:p>
-              <a:p>
-                <a:pPr lvl="1"/>
-                <a:r>
-                  <a:rPr lang="en-US" dirty="0"/>
-                  <a:t>Focus on (pairwise) relations among individuals </a:t>
-                </a:r>
-              </a:p>
-              <a:p>
-                <a:pPr lvl="1"/>
-                <a:r>
-                  <a:rPr lang="en-US" dirty="0"/>
-                  <a:t>Social networks, co-authorship networks, knowledge graphs </a:t>
-                </a:r>
-              </a:p>
-              <a:p>
-                <a:pPr lvl="1"/>
-                <a:endParaRPr lang="en-US" dirty="0"/>
+                <a:endParaRPr lang="en-US" sz="1000" dirty="0">
+                  <a:latin typeface="FiraSans-Book-Identity-H"/>
+                </a:endParaRPr>
               </a:p>
               <a:p>
                 <a:endParaRPr lang="en-US" dirty="0"/>
@@ -28771,13 +30637,13 @@
             </p:txBody>
           </p:sp>
         </mc:Choice>
-        <mc:Fallback xmlns="">
+        <mc:Fallback>
           <p:sp>
             <p:nvSpPr>
               <p:cNvPr id="3" name="Content Placeholder 2">
                 <a:extLst>
                   <a:ext uri="{FF2B5EF4-FFF2-40B4-BE49-F238E27FC236}">
-                    <a16:creationId xmlns:a16="http://schemas.microsoft.com/office/drawing/2014/main" id="{1C494781-9569-4BCE-B3A3-2C8EB0F996BF}"/>
+                    <a16:creationId xmlns:a16="http://schemas.microsoft.com/office/drawing/2014/main" id="{E8259036-E6B6-4582-94B9-C55BB4940051}"/>
                   </a:ext>
                 </a:extLst>
               </p:cNvPr>
@@ -28789,10 +30655,14 @@
               </p:nvPr>
             </p:nvSpPr>
             <p:spPr>
+              <a:xfrm>
+                <a:off x="609600" y="1143000"/>
+                <a:ext cx="10896600" cy="4937760"/>
+              </a:xfrm>
               <a:blipFill>
                 <a:blip r:embed="rId2"/>
                 <a:stretch>
-                  <a:fillRect l="-667" t="-988" r="-1111"/>
+                  <a:fillRect l="-503" t="-1235"/>
                 </a:stretch>
               </a:blipFill>
             </p:spPr>
@@ -28814,7 +30684,7 @@
     </p:spTree>
     <p:extLst>
       <p:ext uri="{BB962C8B-B14F-4D97-AF65-F5344CB8AC3E}">
-        <p14:creationId xmlns:p14="http://schemas.microsoft.com/office/powerpoint/2010/main" val="2750505869"/>
+        <p14:creationId xmlns:p14="http://schemas.microsoft.com/office/powerpoint/2010/main" val="3900732241"/>
       </p:ext>
     </p:extLst>
   </p:cSld>
@@ -28903,37 +30773,6 @@
                                   </p:childTnLst>
                                 </p:cTn>
                               </p:par>
-                              <p:par>
-                                <p:cTn id="9" presetID="1" presetClass="entr" presetSubtype="0" fill="hold" nodeType="withEffect">
-                                  <p:stCondLst>
-                                    <p:cond delay="0"/>
-                                  </p:stCondLst>
-                                  <p:childTnLst>
-                                    <p:set>
-                                      <p:cBhvr>
-                                        <p:cTn id="10" dur="1" fill="hold">
-                                          <p:stCondLst>
-                                            <p:cond delay="0"/>
-                                          </p:stCondLst>
-                                        </p:cTn>
-                                        <p:tgtEl>
-                                          <p:spTgt spid="3">
-                                            <p:txEl>
-                                              <p:pRg st="6" end="6"/>
-                                            </p:txEl>
-                                          </p:spTgt>
-                                        </p:tgtEl>
-                                        <p:attrNameLst>
-                                          <p:attrName>style.visibility</p:attrName>
-                                        </p:attrNameLst>
-                                      </p:cBhvr>
-                                      <p:to>
-                                        <p:strVal val="visible"/>
-                                      </p:to>
-                                    </p:set>
-                                  </p:childTnLst>
-                                </p:cTn>
-                              </p:par>
                             </p:childTnLst>
                           </p:cTn>
                         </p:par>
@@ -28965,12 +30804,18 @@
 </p:sld>
 </file>
 
-<file path=ppt/slides/slide30.xml><?xml version="1.0" encoding="utf-8"?>
+<file path=ppt/slides/slide33.xml><?xml version="1.0" encoding="utf-8"?>
 <p:sld xmlns:a="http://schemas.openxmlformats.org/drawingml/2006/main" xmlns:r="http://schemas.openxmlformats.org/officeDocument/2006/relationships" xmlns:p="http://schemas.openxmlformats.org/presentationml/2006/main">
   <p:cSld>
     <p:spTree>
       <p:nvGrpSpPr>
-        <p:cNvPr id="1" name=""/>
+        <p:cNvPr id="1" name="">
+          <a:extLst>
+            <a:ext uri="{FF2B5EF4-FFF2-40B4-BE49-F238E27FC236}">
+              <a16:creationId xmlns:a16="http://schemas.microsoft.com/office/drawing/2014/main" id="{BCBDF26C-EAA4-9DD7-E33F-CC7BAB93B210}"/>
+            </a:ext>
+          </a:extLst>
+        </p:cNvPr>
         <p:cNvGrpSpPr/>
         <p:nvPr/>
       </p:nvGrpSpPr>
@@ -28987,7 +30832,7 @@
           <p:cNvPr id="2" name="Title 1">
             <a:extLst>
               <a:ext uri="{FF2B5EF4-FFF2-40B4-BE49-F238E27FC236}">
-                <a16:creationId xmlns:a16="http://schemas.microsoft.com/office/drawing/2014/main" id="{05299F4E-C479-46A6-90CC-2B2ED88D35C1}"/>
+                <a16:creationId xmlns:a16="http://schemas.microsoft.com/office/drawing/2014/main" id="{C435D28F-EEA6-7AAF-EDF4-9F1B7A809F1A}"/>
               </a:ext>
             </a:extLst>
           </p:cNvPr>
@@ -29010,14 +30855,14 @@
           </a:p>
         </p:txBody>
       </p:sp>
-      <mc:AlternateContent xmlns:mc="http://schemas.openxmlformats.org/markup-compatibility/2006" xmlns:a14="http://schemas.microsoft.com/office/drawing/2010/main">
-        <mc:Choice Requires="a14">
+      <mc:AlternateContent xmlns:mc="http://schemas.openxmlformats.org/markup-compatibility/2006">
+        <mc:Choice xmlns:a14="http://schemas.microsoft.com/office/drawing/2010/main" Requires="a14">
           <p:sp>
             <p:nvSpPr>
               <p:cNvPr id="3" name="Content Placeholder 2">
                 <a:extLst>
                   <a:ext uri="{FF2B5EF4-FFF2-40B4-BE49-F238E27FC236}">
-                    <a16:creationId xmlns:a16="http://schemas.microsoft.com/office/drawing/2014/main" id="{E8259036-E6B6-4582-94B9-C55BB4940051}"/>
+                    <a16:creationId xmlns:a16="http://schemas.microsoft.com/office/drawing/2014/main" id="{CCB46520-9571-A7D6-2F3F-7A442388CFB2}"/>
                   </a:ext>
                 </a:extLst>
               </p:cNvPr>
@@ -29583,13 +31428,13 @@
             </p:txBody>
           </p:sp>
         </mc:Choice>
-        <mc:Fallback xmlns="">
+        <mc:Fallback>
           <p:sp>
             <p:nvSpPr>
               <p:cNvPr id="3" name="Content Placeholder 2">
                 <a:extLst>
                   <a:ext uri="{FF2B5EF4-FFF2-40B4-BE49-F238E27FC236}">
-                    <a16:creationId xmlns:a16="http://schemas.microsoft.com/office/drawing/2014/main" id="{E8259036-E6B6-4582-94B9-C55BB4940051}"/>
+                    <a16:creationId xmlns:a16="http://schemas.microsoft.com/office/drawing/2014/main" id="{CCB46520-9571-A7D6-2F3F-7A442388CFB2}"/>
                   </a:ext>
                 </a:extLst>
               </p:cNvPr>
@@ -29630,7 +31475,7 @@
     </p:spTree>
     <p:extLst>
       <p:ext uri="{BB962C8B-B14F-4D97-AF65-F5344CB8AC3E}">
-        <p14:creationId xmlns:p14="http://schemas.microsoft.com/office/powerpoint/2010/main" val="3900732241"/>
+        <p14:creationId xmlns:p14="http://schemas.microsoft.com/office/powerpoint/2010/main" val="1375815083"/>
       </p:ext>
     </p:extLst>
   </p:cSld>
@@ -29972,7 +31817,7 @@
 </p:sld>
 </file>
 
-<file path=ppt/slides/slide31.xml><?xml version="1.0" encoding="utf-8"?>
+<file path=ppt/slides/slide34.xml><?xml version="1.0" encoding="utf-8"?>
 <p:sld xmlns:a="http://schemas.openxmlformats.org/drawingml/2006/main" xmlns:r="http://schemas.openxmlformats.org/officeDocument/2006/relationships" xmlns:p="http://schemas.openxmlformats.org/presentationml/2006/main">
   <p:cSld>
     <p:spTree>
@@ -30017,8 +31862,8 @@
           </a:p>
         </p:txBody>
       </p:sp>
-      <mc:AlternateContent xmlns:mc="http://schemas.openxmlformats.org/markup-compatibility/2006" xmlns:a14="http://schemas.microsoft.com/office/drawing/2010/main">
-        <mc:Choice Requires="a14">
+      <mc:AlternateContent xmlns:mc="http://schemas.openxmlformats.org/markup-compatibility/2006">
+        <mc:Choice xmlns:a14="http://schemas.microsoft.com/office/drawing/2010/main" Requires="a14">
           <p:sp>
             <p:nvSpPr>
               <p:cNvPr id="3" name="Content Placeholder 2">
@@ -30110,6 +31955,212 @@
                 </a:r>
               </a:p>
               <a:p>
+                <a:endParaRPr lang="en-US" dirty="0"/>
+              </a:p>
+            </p:txBody>
+          </p:sp>
+        </mc:Choice>
+        <mc:Fallback>
+          <p:sp>
+            <p:nvSpPr>
+              <p:cNvPr id="3" name="Content Placeholder 2">
+                <a:extLst>
+                  <a:ext uri="{FF2B5EF4-FFF2-40B4-BE49-F238E27FC236}">
+                    <a16:creationId xmlns:a16="http://schemas.microsoft.com/office/drawing/2014/main" id="{DBA73E8B-2F10-4186-94FD-040F0B2424EE}"/>
+                  </a:ext>
+                </a:extLst>
+              </p:cNvPr>
+              <p:cNvSpPr>
+                <a:spLocks noGrp="1" noRot="1" noChangeAspect="1" noMove="1" noResize="1" noEditPoints="1" noAdjustHandles="1" noChangeArrowheads="1" noChangeShapeType="1" noTextEdit="1"/>
+              </p:cNvSpPr>
+              <p:nvPr>
+                <p:ph sz="quarter" idx="1"/>
+              </p:nvPr>
+            </p:nvSpPr>
+            <p:spPr>
+              <a:xfrm>
+                <a:off x="609600" y="1219200"/>
+                <a:ext cx="9601200" cy="3057525"/>
+              </a:xfrm>
+              <a:blipFill>
+                <a:blip r:embed="rId2"/>
+                <a:stretch>
+                  <a:fillRect l="-444" t="-1594"/>
+                </a:stretch>
+              </a:blipFill>
+            </p:spPr>
+            <p:txBody>
+              <a:bodyPr/>
+              <a:lstStyle/>
+              <a:p>
+                <a:r>
+                  <a:rPr lang="en-US">
+                    <a:noFill/>
+                  </a:rPr>
+                  <a:t> </a:t>
+                </a:r>
+              </a:p>
+            </p:txBody>
+          </p:sp>
+        </mc:Fallback>
+      </mc:AlternateContent>
+    </p:spTree>
+    <p:extLst>
+      <p:ext uri="{BB962C8B-B14F-4D97-AF65-F5344CB8AC3E}">
+        <p14:creationId xmlns:p14="http://schemas.microsoft.com/office/powerpoint/2010/main" val="3624349870"/>
+      </p:ext>
+    </p:extLst>
+  </p:cSld>
+  <p:clrMapOvr>
+    <a:masterClrMapping/>
+  </p:clrMapOvr>
+</p:sld>
+</file>
+
+<file path=ppt/slides/slide35.xml><?xml version="1.0" encoding="utf-8"?>
+<p:sld xmlns:a="http://schemas.openxmlformats.org/drawingml/2006/main" xmlns:r="http://schemas.openxmlformats.org/officeDocument/2006/relationships" xmlns:p="http://schemas.openxmlformats.org/presentationml/2006/main">
+  <p:cSld>
+    <p:spTree>
+      <p:nvGrpSpPr>
+        <p:cNvPr id="1" name="">
+          <a:extLst>
+            <a:ext uri="{FF2B5EF4-FFF2-40B4-BE49-F238E27FC236}">
+              <a16:creationId xmlns:a16="http://schemas.microsoft.com/office/drawing/2014/main" id="{35AE5FFA-FAE6-EEE5-754D-F455F4FF612E}"/>
+            </a:ext>
+          </a:extLst>
+        </p:cNvPr>
+        <p:cNvGrpSpPr/>
+        <p:nvPr/>
+      </p:nvGrpSpPr>
+      <p:grpSpPr>
+        <a:xfrm>
+          <a:off x="0" y="0"/>
+          <a:ext cx="0" cy="0"/>
+          <a:chOff x="0" y="0"/>
+          <a:chExt cx="0" cy="0"/>
+        </a:xfrm>
+      </p:grpSpPr>
+      <p:sp>
+        <p:nvSpPr>
+          <p:cNvPr id="2" name="Title 1">
+            <a:extLst>
+              <a:ext uri="{FF2B5EF4-FFF2-40B4-BE49-F238E27FC236}">
+                <a16:creationId xmlns:a16="http://schemas.microsoft.com/office/drawing/2014/main" id="{4A1D3389-A50C-6457-7823-6B3A1F3086B6}"/>
+              </a:ext>
+            </a:extLst>
+          </p:cNvPr>
+          <p:cNvSpPr>
+            <a:spLocks noGrp="1"/>
+          </p:cNvSpPr>
+          <p:nvPr>
+            <p:ph type="title"/>
+          </p:nvPr>
+        </p:nvSpPr>
+        <p:spPr/>
+        <p:txBody>
+          <a:bodyPr/>
+          <a:lstStyle/>
+          <a:p>
+            <a:r>
+              <a:rPr lang="en-US" dirty="0"/>
+              <a:t>Adjacency list representation</a:t>
+            </a:r>
+          </a:p>
+        </p:txBody>
+      </p:sp>
+      <mc:AlternateContent xmlns:mc="http://schemas.openxmlformats.org/markup-compatibility/2006">
+        <mc:Choice xmlns:a14="http://schemas.microsoft.com/office/drawing/2010/main" Requires="a14">
+          <p:sp>
+            <p:nvSpPr>
+              <p:cNvPr id="3" name="Content Placeholder 2">
+                <a:extLst>
+                  <a:ext uri="{FF2B5EF4-FFF2-40B4-BE49-F238E27FC236}">
+                    <a16:creationId xmlns:a16="http://schemas.microsoft.com/office/drawing/2014/main" id="{4C5A2018-692C-636A-F90F-A69545D80D86}"/>
+                  </a:ext>
+                </a:extLst>
+              </p:cNvPr>
+              <p:cNvSpPr>
+                <a:spLocks noGrp="1"/>
+              </p:cNvSpPr>
+              <p:nvPr>
+                <p:ph sz="quarter" idx="1"/>
+              </p:nvPr>
+            </p:nvSpPr>
+            <p:spPr>
+              <a:xfrm>
+                <a:off x="609600" y="1219200"/>
+                <a:ext cx="9601200" cy="3057525"/>
+              </a:xfrm>
+            </p:spPr>
+            <p:txBody>
+              <a:bodyPr/>
+              <a:lstStyle/>
+              <a:p>
+                <a:r>
+                  <a:rPr lang="en-US" altLang="en-US" sz="2400" dirty="0"/>
+                  <a:t>Adjacency matrix allocates a bit for each </a:t>
+                </a:r>
+                <a14:m>
+                  <m:oMath xmlns:m="http://schemas.openxmlformats.org/officeDocument/2006/math">
+                    <m:sSup>
+                      <m:sSupPr>
+                        <m:ctrlPr>
+                          <a:rPr lang="en-US" altLang="en-US" sz="2400" i="1">
+                            <a:latin typeface="Cambria Math" panose="02040503050406030204" pitchFamily="18" charset="0"/>
+                          </a:rPr>
+                        </m:ctrlPr>
+                      </m:sSupPr>
+                      <m:e>
+                        <m:d>
+                          <m:dPr>
+                            <m:begChr m:val="|"/>
+                            <m:endChr m:val="|"/>
+                            <m:ctrlPr>
+                              <a:rPr lang="en-US" altLang="en-US" sz="2400" i="1">
+                                <a:latin typeface="Cambria Math" panose="02040503050406030204" pitchFamily="18" charset="0"/>
+                              </a:rPr>
+                            </m:ctrlPr>
+                          </m:dPr>
+                          <m:e>
+                            <m:r>
+                              <a:rPr lang="en-US" altLang="en-US" sz="2400" i="1">
+                                <a:latin typeface="Cambria Math" panose="02040503050406030204" pitchFamily="18" charset="0"/>
+                              </a:rPr>
+                              <m:t>𝑉</m:t>
+                            </m:r>
+                          </m:e>
+                        </m:d>
+                      </m:e>
+                      <m:sup>
+                        <m:r>
+                          <a:rPr lang="en-US" altLang="en-US" sz="2400" i="1">
+                            <a:latin typeface="Cambria Math" panose="02040503050406030204" pitchFamily="18" charset="0"/>
+                          </a:rPr>
+                          <m:t>2</m:t>
+                        </m:r>
+                      </m:sup>
+                    </m:sSup>
+                    <m:r>
+                      <a:rPr lang="en-US" altLang="en-US" sz="2400" i="1">
+                        <a:latin typeface="Cambria Math" panose="02040503050406030204" pitchFamily="18" charset="0"/>
+                      </a:rPr>
+                      <m:t> </m:t>
+                    </m:r>
+                  </m:oMath>
+                </a14:m>
+                <a:r>
+                  <a:rPr lang="en-US" altLang="en-US" sz="2400" dirty="0"/>
+                  <a:t>potential edge</a:t>
+                </a:r>
+              </a:p>
+              <a:p>
+                <a:pPr lvl="1"/>
+                <a:r>
+                  <a:rPr lang="en-US" altLang="en-US" sz="2000" dirty="0"/>
+                  <a:t>What if we only store the edges in the graph?  </a:t>
+                </a:r>
+              </a:p>
+              <a:p>
                 <a:r>
                   <a:rPr lang="en-US" altLang="en-US" sz="2400" dirty="0">
                     <a:solidFill>
@@ -30296,7 +32347,40 @@
                 </a:r>
                 <a:r>
                   <a:rPr lang="en-US" altLang="en-US" sz="1800" dirty="0"/>
-                  <a:t>= adjacency list for node </a:t>
+                  <a:t>is a list containing neighbors of node </a:t>
+                </a:r>
+                <a14:m>
+                  <m:oMath xmlns:m="http://schemas.openxmlformats.org/officeDocument/2006/math">
+                    <m:sSub>
+                      <m:sSubPr>
+                        <m:ctrlPr>
+                          <a:rPr lang="en-US" altLang="en-US" sz="1800" b="0" i="1" dirty="0" smtClean="0">
+                            <a:latin typeface="Cambria Math" panose="02040503050406030204" pitchFamily="18" charset="0"/>
+                          </a:rPr>
+                        </m:ctrlPr>
+                      </m:sSubPr>
+                      <m:e>
+                        <m:r>
+                          <a:rPr lang="en-US" altLang="en-US" sz="1800" b="0" i="1" dirty="0" smtClean="0">
+                            <a:latin typeface="Cambria Math" panose="02040503050406030204" pitchFamily="18" charset="0"/>
+                          </a:rPr>
+                          <m:t>𝑣</m:t>
+                        </m:r>
+                      </m:e>
+                      <m:sub>
+                        <m:r>
+                          <a:rPr lang="en-US" altLang="en-US" sz="1800" b="0" i="1" dirty="0" smtClean="0">
+                            <a:latin typeface="Cambria Math" panose="02040503050406030204" pitchFamily="18" charset="0"/>
+                          </a:rPr>
+                          <m:t>𝑖</m:t>
+                        </m:r>
+                      </m:sub>
+                    </m:sSub>
+                  </m:oMath>
+                </a14:m>
+                <a:r>
+                  <a:rPr lang="en-US" altLang="en-US" sz="1800" dirty="0"/>
+                  <a:t>. This is called the adjacency list for node </a:t>
                 </a:r>
                 <a14:m>
                   <m:oMath xmlns:m="http://schemas.openxmlformats.org/officeDocument/2006/math">
@@ -30335,13 +32419,13 @@
             </p:txBody>
           </p:sp>
         </mc:Choice>
-        <mc:Fallback xmlns="">
+        <mc:Fallback>
           <p:sp>
             <p:nvSpPr>
               <p:cNvPr id="3" name="Content Placeholder 2">
                 <a:extLst>
                   <a:ext uri="{FF2B5EF4-FFF2-40B4-BE49-F238E27FC236}">
-                    <a16:creationId xmlns:a16="http://schemas.microsoft.com/office/drawing/2014/main" id="{DBA73E8B-2F10-4186-94FD-040F0B2424EE}"/>
+                    <a16:creationId xmlns:a16="http://schemas.microsoft.com/office/drawing/2014/main" id="{4C5A2018-692C-636A-F90F-A69545D80D86}"/>
                   </a:ext>
                 </a:extLst>
               </p:cNvPr>
@@ -30384,7 +32468,7 @@
           <p:cNvPr id="6" name="Group 5">
             <a:extLst>
               <a:ext uri="{FF2B5EF4-FFF2-40B4-BE49-F238E27FC236}">
-                <a16:creationId xmlns:a16="http://schemas.microsoft.com/office/drawing/2014/main" id="{2FEC42D7-CE37-4168-ACED-70CC4925A906}"/>
+                <a16:creationId xmlns:a16="http://schemas.microsoft.com/office/drawing/2014/main" id="{49D65487-6A5C-D474-9018-802A5EB31A45}"/>
               </a:ext>
             </a:extLst>
           </p:cNvPr>
@@ -30404,7 +32488,7 @@
             <p:cNvPr id="4" name="Picture 2">
               <a:extLst>
                 <a:ext uri="{FF2B5EF4-FFF2-40B4-BE49-F238E27FC236}">
-                  <a16:creationId xmlns:a16="http://schemas.microsoft.com/office/drawing/2014/main" id="{EE49290C-4188-43B6-A617-87D929C573C3}"/>
+                  <a16:creationId xmlns:a16="http://schemas.microsoft.com/office/drawing/2014/main" id="{1D15A3B3-6E7D-D21A-0E50-B0874DB4E79B}"/>
                 </a:ext>
               </a:extLst>
             </p:cNvPr>
@@ -30464,7 +32548,7 @@
             <p:cNvPr id="5" name="Rectangle 4">
               <a:extLst>
                 <a:ext uri="{FF2B5EF4-FFF2-40B4-BE49-F238E27FC236}">
-                  <a16:creationId xmlns:a16="http://schemas.microsoft.com/office/drawing/2014/main" id="{180BC1EB-5DD1-4557-A619-84E1AAF33C9C}"/>
+                  <a16:creationId xmlns:a16="http://schemas.microsoft.com/office/drawing/2014/main" id="{56CF32EC-753A-6404-0C0B-642655B1D215}"/>
                 </a:ext>
               </a:extLst>
             </p:cNvPr>
@@ -30522,7 +32606,7 @@
     </p:spTree>
     <p:extLst>
       <p:ext uri="{BB962C8B-B14F-4D97-AF65-F5344CB8AC3E}">
-        <p14:creationId xmlns:p14="http://schemas.microsoft.com/office/powerpoint/2010/main" val="3624349870"/>
+        <p14:creationId xmlns:p14="http://schemas.microsoft.com/office/powerpoint/2010/main" val="2678432890"/>
       </p:ext>
     </p:extLst>
   </p:cSld>
@@ -30558,210 +32642,6 @@
                                     <p:set>
                                       <p:cBhvr>
                                         <p:cTn id="6" dur="1" fill="hold">
-                                          <p:stCondLst>
-                                            <p:cond delay="0"/>
-                                          </p:stCondLst>
-                                        </p:cTn>
-                                        <p:tgtEl>
-                                          <p:spTgt spid="3">
-                                            <p:txEl>
-                                              <p:pRg st="2" end="2"/>
-                                            </p:txEl>
-                                          </p:spTgt>
-                                        </p:tgtEl>
-                                        <p:attrNameLst>
-                                          <p:attrName>style.visibility</p:attrName>
-                                        </p:attrNameLst>
-                                      </p:cBhvr>
-                                      <p:to>
-                                        <p:strVal val="visible"/>
-                                      </p:to>
-                                    </p:set>
-                                  </p:childTnLst>
-                                </p:cTn>
-                              </p:par>
-                              <p:par>
-                                <p:cTn id="7" presetID="1" presetClass="entr" presetSubtype="0" fill="hold" nodeType="withEffect">
-                                  <p:stCondLst>
-                                    <p:cond delay="0"/>
-                                  </p:stCondLst>
-                                  <p:childTnLst>
-                                    <p:set>
-                                      <p:cBhvr>
-                                        <p:cTn id="8" dur="1" fill="hold">
-                                          <p:stCondLst>
-                                            <p:cond delay="0"/>
-                                          </p:stCondLst>
-                                        </p:cTn>
-                                        <p:tgtEl>
-                                          <p:spTgt spid="3">
-                                            <p:txEl>
-                                              <p:pRg st="3" end="3"/>
-                                            </p:txEl>
-                                          </p:spTgt>
-                                        </p:tgtEl>
-                                        <p:attrNameLst>
-                                          <p:attrName>style.visibility</p:attrName>
-                                        </p:attrNameLst>
-                                      </p:cBhvr>
-                                      <p:to>
-                                        <p:strVal val="visible"/>
-                                      </p:to>
-                                    </p:set>
-                                  </p:childTnLst>
-                                </p:cTn>
-                              </p:par>
-                              <p:par>
-                                <p:cTn id="9" presetID="1" presetClass="entr" presetSubtype="0" fill="hold" nodeType="withEffect">
-                                  <p:stCondLst>
-                                    <p:cond delay="0"/>
-                                  </p:stCondLst>
-                                  <p:childTnLst>
-                                    <p:set>
-                                      <p:cBhvr>
-                                        <p:cTn id="10" dur="1" fill="hold">
-                                          <p:stCondLst>
-                                            <p:cond delay="0"/>
-                                          </p:stCondLst>
-                                        </p:cTn>
-                                        <p:tgtEl>
-                                          <p:spTgt spid="3">
-                                            <p:txEl>
-                                              <p:pRg st="4" end="4"/>
-                                            </p:txEl>
-                                          </p:spTgt>
-                                        </p:tgtEl>
-                                        <p:attrNameLst>
-                                          <p:attrName>style.visibility</p:attrName>
-                                        </p:attrNameLst>
-                                      </p:cBhvr>
-                                      <p:to>
-                                        <p:strVal val="visible"/>
-                                      </p:to>
-                                    </p:set>
-                                  </p:childTnLst>
-                                </p:cTn>
-                              </p:par>
-                              <p:par>
-                                <p:cTn id="11" presetID="1" presetClass="entr" presetSubtype="0" fill="hold" nodeType="withEffect">
-                                  <p:stCondLst>
-                                    <p:cond delay="0"/>
-                                  </p:stCondLst>
-                                  <p:childTnLst>
-                                    <p:set>
-                                      <p:cBhvr>
-                                        <p:cTn id="12" dur="1" fill="hold">
-                                          <p:stCondLst>
-                                            <p:cond delay="0"/>
-                                          </p:stCondLst>
-                                        </p:cTn>
-                                        <p:tgtEl>
-                                          <p:spTgt spid="3">
-                                            <p:txEl>
-                                              <p:pRg st="5" end="5"/>
-                                            </p:txEl>
-                                          </p:spTgt>
-                                        </p:tgtEl>
-                                        <p:attrNameLst>
-                                          <p:attrName>style.visibility</p:attrName>
-                                        </p:attrNameLst>
-                                      </p:cBhvr>
-                                      <p:to>
-                                        <p:strVal val="visible"/>
-                                      </p:to>
-                                    </p:set>
-                                  </p:childTnLst>
-                                </p:cTn>
-                              </p:par>
-                              <p:par>
-                                <p:cTn id="13" presetID="1" presetClass="entr" presetSubtype="0" fill="hold" nodeType="withEffect">
-                                  <p:stCondLst>
-                                    <p:cond delay="0"/>
-                                  </p:stCondLst>
-                                  <p:childTnLst>
-                                    <p:set>
-                                      <p:cBhvr>
-                                        <p:cTn id="14" dur="1" fill="hold">
-                                          <p:stCondLst>
-                                            <p:cond delay="0"/>
-                                          </p:stCondLst>
-                                        </p:cTn>
-                                        <p:tgtEl>
-                                          <p:spTgt spid="3">
-                                            <p:txEl>
-                                              <p:pRg st="6" end="6"/>
-                                            </p:txEl>
-                                          </p:spTgt>
-                                        </p:tgtEl>
-                                        <p:attrNameLst>
-                                          <p:attrName>style.visibility</p:attrName>
-                                        </p:attrNameLst>
-                                      </p:cBhvr>
-                                      <p:to>
-                                        <p:strVal val="visible"/>
-                                      </p:to>
-                                    </p:set>
-                                  </p:childTnLst>
-                                </p:cTn>
-                              </p:par>
-                              <p:par>
-                                <p:cTn id="15" presetID="1" presetClass="entr" presetSubtype="0" fill="hold" nodeType="withEffect">
-                                  <p:stCondLst>
-                                    <p:cond delay="0"/>
-                                  </p:stCondLst>
-                                  <p:childTnLst>
-                                    <p:set>
-                                      <p:cBhvr>
-                                        <p:cTn id="16" dur="1" fill="hold">
-                                          <p:stCondLst>
-                                            <p:cond delay="0"/>
-                                          </p:stCondLst>
-                                        </p:cTn>
-                                        <p:tgtEl>
-                                          <p:spTgt spid="3">
-                                            <p:txEl>
-                                              <p:pRg st="7" end="7"/>
-                                            </p:txEl>
-                                          </p:spTgt>
-                                        </p:tgtEl>
-                                        <p:attrNameLst>
-                                          <p:attrName>style.visibility</p:attrName>
-                                        </p:attrNameLst>
-                                      </p:cBhvr>
-                                      <p:to>
-                                        <p:strVal val="visible"/>
-                                      </p:to>
-                                    </p:set>
-                                  </p:childTnLst>
-                                </p:cTn>
-                              </p:par>
-                            </p:childTnLst>
-                          </p:cTn>
-                        </p:par>
-                      </p:childTnLst>
-                    </p:cTn>
-                  </p:par>
-                  <p:par>
-                    <p:cTn id="17" fill="hold">
-                      <p:stCondLst>
-                        <p:cond delay="indefinite"/>
-                      </p:stCondLst>
-                      <p:childTnLst>
-                        <p:par>
-                          <p:cTn id="18" fill="hold">
-                            <p:stCondLst>
-                              <p:cond delay="0"/>
-                            </p:stCondLst>
-                            <p:childTnLst>
-                              <p:par>
-                                <p:cTn id="19" presetID="1" presetClass="entr" presetSubtype="0" fill="hold" nodeType="clickEffect">
-                                  <p:stCondLst>
-                                    <p:cond delay="0"/>
-                                  </p:stCondLst>
-                                  <p:childTnLst>
-                                    <p:set>
-                                      <p:cBhvr>
-                                        <p:cTn id="20" dur="1" fill="hold">
                                           <p:stCondLst>
                                             <p:cond delay="0"/>
                                           </p:stCondLst>
@@ -30811,7 +32691,7 @@
 </p:sld>
 </file>
 
-<file path=ppt/slides/slide32.xml><?xml version="1.0" encoding="utf-8"?>
+<file path=ppt/slides/slide36.xml><?xml version="1.0" encoding="utf-8"?>
 <p:sld xmlns:a="http://schemas.openxmlformats.org/drawingml/2006/main" xmlns:r="http://schemas.openxmlformats.org/officeDocument/2006/relationships" xmlns:p="http://schemas.openxmlformats.org/presentationml/2006/main">
   <p:cSld>
     <p:spTree>
@@ -31643,7 +33523,7 @@
 </p:sld>
 </file>
 
-<file path=ppt/slides/slide33.xml><?xml version="1.0" encoding="utf-8"?>
+<file path=ppt/slides/slide37.xml><?xml version="1.0" encoding="utf-8"?>
 <p:sld xmlns:a="http://schemas.openxmlformats.org/drawingml/2006/main" xmlns:r="http://schemas.openxmlformats.org/officeDocument/2006/relationships" xmlns:p="http://schemas.openxmlformats.org/presentationml/2006/main">
   <p:cSld>
     <p:spTree>
@@ -32714,7 +34594,7 @@
 </p:sld>
 </file>
 
-<file path=ppt/slides/slide34.xml><?xml version="1.0" encoding="utf-8"?>
+<file path=ppt/slides/slide38.xml><?xml version="1.0" encoding="utf-8"?>
 <p:sld xmlns:a="http://schemas.openxmlformats.org/drawingml/2006/main" xmlns:r="http://schemas.openxmlformats.org/officeDocument/2006/relationships" xmlns:p="http://schemas.openxmlformats.org/presentationml/2006/main">
   <p:cSld>
     <p:spTree>
@@ -32867,7 +34747,7 @@
 </p:sld>
 </file>
 
-<file path=ppt/slides/slide35.xml><?xml version="1.0" encoding="utf-8"?>
+<file path=ppt/slides/slide39.xml><?xml version="1.0" encoding="utf-8"?>
 <p:sld xmlns:a="http://schemas.openxmlformats.org/drawingml/2006/main" xmlns:r="http://schemas.openxmlformats.org/officeDocument/2006/relationships" xmlns:p="http://schemas.openxmlformats.org/presentationml/2006/main">
   <p:cSld>
     <p:spTree>
@@ -33280,7 +35160,262 @@
 </p:sld>
 </file>
 
-<file path=ppt/slides/slide36.xml><?xml version="1.0" encoding="utf-8"?>
+<file path=ppt/slides/slide4.xml><?xml version="1.0" encoding="utf-8"?>
+<p:sld xmlns:a="http://schemas.openxmlformats.org/drawingml/2006/main" xmlns:r="http://schemas.openxmlformats.org/officeDocument/2006/relationships" xmlns:p="http://schemas.openxmlformats.org/presentationml/2006/main">
+  <p:cSld>
+    <p:spTree>
+      <p:nvGrpSpPr>
+        <p:cNvPr id="1" name=""/>
+        <p:cNvGrpSpPr/>
+        <p:nvPr/>
+      </p:nvGrpSpPr>
+      <p:grpSpPr>
+        <a:xfrm>
+          <a:off x="0" y="0"/>
+          <a:ext cx="0" cy="0"/>
+          <a:chOff x="0" y="0"/>
+          <a:chExt cx="0" cy="0"/>
+        </a:xfrm>
+      </p:grpSpPr>
+      <p:sp>
+        <p:nvSpPr>
+          <p:cNvPr id="2" name="Title 1">
+            <a:extLst>
+              <a:ext uri="{FF2B5EF4-FFF2-40B4-BE49-F238E27FC236}">
+                <a16:creationId xmlns:a16="http://schemas.microsoft.com/office/drawing/2014/main" id="{84E62901-E1A3-4B59-BBCE-520A09596291}"/>
+              </a:ext>
+            </a:extLst>
+          </p:cNvPr>
+          <p:cNvSpPr>
+            <a:spLocks noGrp="1"/>
+          </p:cNvSpPr>
+          <p:nvPr>
+            <p:ph type="title"/>
+          </p:nvPr>
+        </p:nvSpPr>
+        <p:spPr/>
+        <p:txBody>
+          <a:bodyPr/>
+          <a:lstStyle/>
+          <a:p>
+            <a:r>
+              <a:rPr lang="en-US" dirty="0"/>
+              <a:t>Examples </a:t>
+            </a:r>
+          </a:p>
+        </p:txBody>
+      </p:sp>
+      <p:sp>
+        <p:nvSpPr>
+          <p:cNvPr id="3" name="Content Placeholder 2">
+            <a:extLst>
+              <a:ext uri="{FF2B5EF4-FFF2-40B4-BE49-F238E27FC236}">
+                <a16:creationId xmlns:a16="http://schemas.microsoft.com/office/drawing/2014/main" id="{2A0B51DF-8216-4B13-90B5-D0C1201A4EB0}"/>
+              </a:ext>
+            </a:extLst>
+          </p:cNvPr>
+          <p:cNvSpPr>
+            <a:spLocks noGrp="1"/>
+          </p:cNvSpPr>
+          <p:nvPr>
+            <p:ph sz="quarter" idx="1"/>
+          </p:nvPr>
+        </p:nvSpPr>
+        <p:spPr>
+          <a:xfrm>
+            <a:off x="719959" y="1447800"/>
+            <a:ext cx="4343400" cy="518160"/>
+          </a:xfrm>
+        </p:spPr>
+        <p:txBody>
+          <a:bodyPr/>
+          <a:lstStyle/>
+          <a:p>
+            <a:r>
+              <a:rPr lang="en-US" dirty="0"/>
+              <a:t>Social networks</a:t>
+            </a:r>
+          </a:p>
+        </p:txBody>
+      </p:sp>
+      <p:pic>
+        <p:nvPicPr>
+          <p:cNvPr id="5" name="Picture 4" descr="Diagram, schematic&#10;&#10;Description automatically generated">
+            <a:extLst>
+              <a:ext uri="{FF2B5EF4-FFF2-40B4-BE49-F238E27FC236}">
+                <a16:creationId xmlns:a16="http://schemas.microsoft.com/office/drawing/2014/main" id="{45227DBC-638D-4E0E-8EDA-98F157BE7E88}"/>
+              </a:ext>
+            </a:extLst>
+          </p:cNvPr>
+          <p:cNvPicPr>
+            <a:picLocks noChangeAspect="1"/>
+          </p:cNvPicPr>
+          <p:nvPr/>
+        </p:nvPicPr>
+        <p:blipFill>
+          <a:blip r:embed="rId2">
+            <a:extLst>
+              <a:ext uri="{28A0092B-C50C-407E-A947-70E740481C1C}">
+                <a14:useLocalDpi xmlns:a14="http://schemas.microsoft.com/office/drawing/2010/main" val="0"/>
+              </a:ext>
+            </a:extLst>
+          </a:blip>
+          <a:stretch>
+            <a:fillRect/>
+          </a:stretch>
+        </p:blipFill>
+        <p:spPr>
+          <a:xfrm>
+            <a:off x="685800" y="2057400"/>
+            <a:ext cx="3795712" cy="3795712"/>
+          </a:xfrm>
+          <a:prstGeom prst="rect">
+            <a:avLst/>
+          </a:prstGeom>
+        </p:spPr>
+      </p:pic>
+      <p:sp>
+        <p:nvSpPr>
+          <p:cNvPr id="6" name="TextBox 5">
+            <a:extLst>
+              <a:ext uri="{FF2B5EF4-FFF2-40B4-BE49-F238E27FC236}">
+                <a16:creationId xmlns:a16="http://schemas.microsoft.com/office/drawing/2014/main" id="{B15C4F80-CD2A-4ED9-8421-8BD68B966D7C}"/>
+              </a:ext>
+            </a:extLst>
+          </p:cNvPr>
+          <p:cNvSpPr txBox="1"/>
+          <p:nvPr/>
+        </p:nvSpPr>
+        <p:spPr>
+          <a:xfrm>
+            <a:off x="872359" y="5944553"/>
+            <a:ext cx="3795712" cy="323165"/>
+          </a:xfrm>
+          <a:prstGeom prst="rect">
+            <a:avLst/>
+          </a:prstGeom>
+          <a:noFill/>
+        </p:spPr>
+        <p:txBody>
+          <a:bodyPr wrap="square" rtlCol="0">
+            <a:spAutoFit/>
+          </a:bodyPr>
+          <a:lstStyle/>
+          <a:p>
+            <a:r>
+              <a:rPr lang="en-US" sz="1500" dirty="0"/>
+              <a:t>Moreno's sociogram of a 2nd grade class</a:t>
+            </a:r>
+          </a:p>
+        </p:txBody>
+      </p:sp>
+      <p:grpSp>
+        <p:nvGrpSpPr>
+          <p:cNvPr id="12" name="Group 11">
+            <a:extLst>
+              <a:ext uri="{FF2B5EF4-FFF2-40B4-BE49-F238E27FC236}">
+                <a16:creationId xmlns:a16="http://schemas.microsoft.com/office/drawing/2014/main" id="{7435BFFA-D355-43E2-9267-B7588CE1839A}"/>
+              </a:ext>
+            </a:extLst>
+          </p:cNvPr>
+          <p:cNvGrpSpPr/>
+          <p:nvPr/>
+        </p:nvGrpSpPr>
+        <p:grpSpPr>
+          <a:xfrm>
+            <a:off x="6086168" y="1926127"/>
+            <a:ext cx="4124632" cy="4341590"/>
+            <a:chOff x="4562168" y="1926127"/>
+            <a:chExt cx="4124632" cy="4341590"/>
+          </a:xfrm>
+        </p:grpSpPr>
+        <p:pic>
+          <p:nvPicPr>
+            <p:cNvPr id="10" name="Picture 9" descr="A picture containing light, outdoor object, dark, night&#10;&#10;Description automatically generated">
+              <a:extLst>
+                <a:ext uri="{FF2B5EF4-FFF2-40B4-BE49-F238E27FC236}">
+                  <a16:creationId xmlns:a16="http://schemas.microsoft.com/office/drawing/2014/main" id="{6F6B215D-21AA-4FC2-B19E-93DD275F6E84}"/>
+                </a:ext>
+              </a:extLst>
+            </p:cNvPr>
+            <p:cNvPicPr>
+              <a:picLocks noChangeAspect="1"/>
+            </p:cNvPicPr>
+            <p:nvPr/>
+          </p:nvPicPr>
+          <p:blipFill>
+            <a:blip r:embed="rId3">
+              <a:extLst>
+                <a:ext uri="{28A0092B-C50C-407E-A947-70E740481C1C}">
+                  <a14:useLocalDpi xmlns:a14="http://schemas.microsoft.com/office/drawing/2010/main" val="0"/>
+                </a:ext>
+              </a:extLst>
+            </a:blip>
+            <a:stretch>
+              <a:fillRect/>
+            </a:stretch>
+          </p:blipFill>
+          <p:spPr>
+            <a:xfrm>
+              <a:off x="4562168" y="1926127"/>
+              <a:ext cx="4124632" cy="4023680"/>
+            </a:xfrm>
+            <a:prstGeom prst="rect">
+              <a:avLst/>
+            </a:prstGeom>
+          </p:spPr>
+        </p:pic>
+        <p:sp>
+          <p:nvSpPr>
+            <p:cNvPr id="11" name="TextBox 10">
+              <a:extLst>
+                <a:ext uri="{FF2B5EF4-FFF2-40B4-BE49-F238E27FC236}">
+                  <a16:creationId xmlns:a16="http://schemas.microsoft.com/office/drawing/2014/main" id="{27DAE457-A96B-4D0A-A8D2-F9B4AAC98AFB}"/>
+                </a:ext>
+              </a:extLst>
+            </p:cNvPr>
+            <p:cNvSpPr txBox="1"/>
+            <p:nvPr/>
+          </p:nvSpPr>
+          <p:spPr>
+            <a:xfrm>
+              <a:off x="4792717" y="5944552"/>
+              <a:ext cx="3795712" cy="323165"/>
+            </a:xfrm>
+            <a:prstGeom prst="rect">
+              <a:avLst/>
+            </a:prstGeom>
+            <a:noFill/>
+          </p:spPr>
+          <p:txBody>
+            <a:bodyPr wrap="square" rtlCol="0">
+              <a:spAutoFit/>
+            </a:bodyPr>
+            <a:lstStyle/>
+            <a:p>
+              <a:pPr algn="ctr"/>
+              <a:r>
+                <a:rPr lang="en-US" sz="1500" dirty="0"/>
+                <a:t>Facebook friendship social graph</a:t>
+              </a:r>
+            </a:p>
+          </p:txBody>
+        </p:sp>
+      </p:grpSp>
+    </p:spTree>
+    <p:extLst>
+      <p:ext uri="{BB962C8B-B14F-4D97-AF65-F5344CB8AC3E}">
+        <p14:creationId xmlns:p14="http://schemas.microsoft.com/office/powerpoint/2010/main" val="436343008"/>
+      </p:ext>
+    </p:extLst>
+  </p:cSld>
+  <p:clrMapOvr>
+    <a:masterClrMapping/>
+  </p:clrMapOvr>
+</p:sld>
+</file>
+
+<file path=ppt/slides/slide40.xml><?xml version="1.0" encoding="utf-8"?>
 <p:sld xmlns:a="http://schemas.openxmlformats.org/drawingml/2006/main" xmlns:r="http://schemas.openxmlformats.org/officeDocument/2006/relationships" xmlns:p="http://schemas.openxmlformats.org/presentationml/2006/main">
   <p:cSld>
     <p:spTree>
@@ -33525,7 +35660,7 @@
 </p:sld>
 </file>
 
-<file path=ppt/slides/slide37.xml><?xml version="1.0" encoding="utf-8"?>
+<file path=ppt/slides/slide41.xml><?xml version="1.0" encoding="utf-8"?>
 <p:sld xmlns:a="http://schemas.openxmlformats.org/drawingml/2006/main" xmlns:r="http://schemas.openxmlformats.org/officeDocument/2006/relationships" xmlns:p="http://schemas.openxmlformats.org/presentationml/2006/main">
   <p:cSld>
     <p:spTree>
@@ -34185,7 +36320,7 @@
 </p:sld>
 </file>
 
-<file path=ppt/slides/slide38.xml><?xml version="1.0" encoding="utf-8"?>
+<file path=ppt/slides/slide42.xml><?xml version="1.0" encoding="utf-8"?>
 <p:sld xmlns:a="http://schemas.openxmlformats.org/drawingml/2006/main" xmlns:r="http://schemas.openxmlformats.org/officeDocument/2006/relationships" xmlns:p="http://schemas.openxmlformats.org/presentationml/2006/main">
   <p:cSld>
     <p:spTree>
@@ -35214,7 +37349,7 @@
 </p:sld>
 </file>
 
-<file path=ppt/slides/slide39.xml><?xml version="1.0" encoding="utf-8"?>
+<file path=ppt/slides/slide43.xml><?xml version="1.0" encoding="utf-8"?>
 <p:sld xmlns:a="http://schemas.openxmlformats.org/drawingml/2006/main" xmlns:r="http://schemas.openxmlformats.org/officeDocument/2006/relationships" xmlns:p="http://schemas.openxmlformats.org/presentationml/2006/main">
   <p:cSld>
     <p:spTree>
@@ -35650,262 +37785,7 @@
 </p:sld>
 </file>
 
-<file path=ppt/slides/slide4.xml><?xml version="1.0" encoding="utf-8"?>
-<p:sld xmlns:a="http://schemas.openxmlformats.org/drawingml/2006/main" xmlns:r="http://schemas.openxmlformats.org/officeDocument/2006/relationships" xmlns:p="http://schemas.openxmlformats.org/presentationml/2006/main">
-  <p:cSld>
-    <p:spTree>
-      <p:nvGrpSpPr>
-        <p:cNvPr id="1" name=""/>
-        <p:cNvGrpSpPr/>
-        <p:nvPr/>
-      </p:nvGrpSpPr>
-      <p:grpSpPr>
-        <a:xfrm>
-          <a:off x="0" y="0"/>
-          <a:ext cx="0" cy="0"/>
-          <a:chOff x="0" y="0"/>
-          <a:chExt cx="0" cy="0"/>
-        </a:xfrm>
-      </p:grpSpPr>
-      <p:sp>
-        <p:nvSpPr>
-          <p:cNvPr id="2" name="Title 1">
-            <a:extLst>
-              <a:ext uri="{FF2B5EF4-FFF2-40B4-BE49-F238E27FC236}">
-                <a16:creationId xmlns:a16="http://schemas.microsoft.com/office/drawing/2014/main" id="{84E62901-E1A3-4B59-BBCE-520A09596291}"/>
-              </a:ext>
-            </a:extLst>
-          </p:cNvPr>
-          <p:cNvSpPr>
-            <a:spLocks noGrp="1"/>
-          </p:cNvSpPr>
-          <p:nvPr>
-            <p:ph type="title"/>
-          </p:nvPr>
-        </p:nvSpPr>
-        <p:spPr/>
-        <p:txBody>
-          <a:bodyPr/>
-          <a:lstStyle/>
-          <a:p>
-            <a:r>
-              <a:rPr lang="en-US" dirty="0"/>
-              <a:t>Examples </a:t>
-            </a:r>
-          </a:p>
-        </p:txBody>
-      </p:sp>
-      <p:sp>
-        <p:nvSpPr>
-          <p:cNvPr id="3" name="Content Placeholder 2">
-            <a:extLst>
-              <a:ext uri="{FF2B5EF4-FFF2-40B4-BE49-F238E27FC236}">
-                <a16:creationId xmlns:a16="http://schemas.microsoft.com/office/drawing/2014/main" id="{2A0B51DF-8216-4B13-90B5-D0C1201A4EB0}"/>
-              </a:ext>
-            </a:extLst>
-          </p:cNvPr>
-          <p:cNvSpPr>
-            <a:spLocks noGrp="1"/>
-          </p:cNvSpPr>
-          <p:nvPr>
-            <p:ph sz="quarter" idx="1"/>
-          </p:nvPr>
-        </p:nvSpPr>
-        <p:spPr>
-          <a:xfrm>
-            <a:off x="719959" y="1447800"/>
-            <a:ext cx="4343400" cy="518160"/>
-          </a:xfrm>
-        </p:spPr>
-        <p:txBody>
-          <a:bodyPr/>
-          <a:lstStyle/>
-          <a:p>
-            <a:r>
-              <a:rPr lang="en-US" dirty="0"/>
-              <a:t>Social networks</a:t>
-            </a:r>
-          </a:p>
-        </p:txBody>
-      </p:sp>
-      <p:pic>
-        <p:nvPicPr>
-          <p:cNvPr id="5" name="Picture 4" descr="Diagram, schematic&#10;&#10;Description automatically generated">
-            <a:extLst>
-              <a:ext uri="{FF2B5EF4-FFF2-40B4-BE49-F238E27FC236}">
-                <a16:creationId xmlns:a16="http://schemas.microsoft.com/office/drawing/2014/main" id="{45227DBC-638D-4E0E-8EDA-98F157BE7E88}"/>
-              </a:ext>
-            </a:extLst>
-          </p:cNvPr>
-          <p:cNvPicPr>
-            <a:picLocks noChangeAspect="1"/>
-          </p:cNvPicPr>
-          <p:nvPr/>
-        </p:nvPicPr>
-        <p:blipFill>
-          <a:blip r:embed="rId2">
-            <a:extLst>
-              <a:ext uri="{28A0092B-C50C-407E-A947-70E740481C1C}">
-                <a14:useLocalDpi xmlns:a14="http://schemas.microsoft.com/office/drawing/2010/main" val="0"/>
-              </a:ext>
-            </a:extLst>
-          </a:blip>
-          <a:stretch>
-            <a:fillRect/>
-          </a:stretch>
-        </p:blipFill>
-        <p:spPr>
-          <a:xfrm>
-            <a:off x="685800" y="2057400"/>
-            <a:ext cx="3795712" cy="3795712"/>
-          </a:xfrm>
-          <a:prstGeom prst="rect">
-            <a:avLst/>
-          </a:prstGeom>
-        </p:spPr>
-      </p:pic>
-      <p:sp>
-        <p:nvSpPr>
-          <p:cNvPr id="6" name="TextBox 5">
-            <a:extLst>
-              <a:ext uri="{FF2B5EF4-FFF2-40B4-BE49-F238E27FC236}">
-                <a16:creationId xmlns:a16="http://schemas.microsoft.com/office/drawing/2014/main" id="{B15C4F80-CD2A-4ED9-8421-8BD68B966D7C}"/>
-              </a:ext>
-            </a:extLst>
-          </p:cNvPr>
-          <p:cNvSpPr txBox="1"/>
-          <p:nvPr/>
-        </p:nvSpPr>
-        <p:spPr>
-          <a:xfrm>
-            <a:off x="872359" y="5944553"/>
-            <a:ext cx="3795712" cy="323165"/>
-          </a:xfrm>
-          <a:prstGeom prst="rect">
-            <a:avLst/>
-          </a:prstGeom>
-          <a:noFill/>
-        </p:spPr>
-        <p:txBody>
-          <a:bodyPr wrap="square" rtlCol="0">
-            <a:spAutoFit/>
-          </a:bodyPr>
-          <a:lstStyle/>
-          <a:p>
-            <a:r>
-              <a:rPr lang="en-US" sz="1500" dirty="0"/>
-              <a:t>Moreno's sociogram of a 2nd grade class</a:t>
-            </a:r>
-          </a:p>
-        </p:txBody>
-      </p:sp>
-      <p:grpSp>
-        <p:nvGrpSpPr>
-          <p:cNvPr id="12" name="Group 11">
-            <a:extLst>
-              <a:ext uri="{FF2B5EF4-FFF2-40B4-BE49-F238E27FC236}">
-                <a16:creationId xmlns:a16="http://schemas.microsoft.com/office/drawing/2014/main" id="{7435BFFA-D355-43E2-9267-B7588CE1839A}"/>
-              </a:ext>
-            </a:extLst>
-          </p:cNvPr>
-          <p:cNvGrpSpPr/>
-          <p:nvPr/>
-        </p:nvGrpSpPr>
-        <p:grpSpPr>
-          <a:xfrm>
-            <a:off x="6086168" y="1926127"/>
-            <a:ext cx="4124632" cy="4341590"/>
-            <a:chOff x="4562168" y="1926127"/>
-            <a:chExt cx="4124632" cy="4341590"/>
-          </a:xfrm>
-        </p:grpSpPr>
-        <p:pic>
-          <p:nvPicPr>
-            <p:cNvPr id="10" name="Picture 9" descr="A picture containing light, outdoor object, dark, night&#10;&#10;Description automatically generated">
-              <a:extLst>
-                <a:ext uri="{FF2B5EF4-FFF2-40B4-BE49-F238E27FC236}">
-                  <a16:creationId xmlns:a16="http://schemas.microsoft.com/office/drawing/2014/main" id="{6F6B215D-21AA-4FC2-B19E-93DD275F6E84}"/>
-                </a:ext>
-              </a:extLst>
-            </p:cNvPr>
-            <p:cNvPicPr>
-              <a:picLocks noChangeAspect="1"/>
-            </p:cNvPicPr>
-            <p:nvPr/>
-          </p:nvPicPr>
-          <p:blipFill>
-            <a:blip r:embed="rId3">
-              <a:extLst>
-                <a:ext uri="{28A0092B-C50C-407E-A947-70E740481C1C}">
-                  <a14:useLocalDpi xmlns:a14="http://schemas.microsoft.com/office/drawing/2010/main" val="0"/>
-                </a:ext>
-              </a:extLst>
-            </a:blip>
-            <a:stretch>
-              <a:fillRect/>
-            </a:stretch>
-          </p:blipFill>
-          <p:spPr>
-            <a:xfrm>
-              <a:off x="4562168" y="1926127"/>
-              <a:ext cx="4124632" cy="4023680"/>
-            </a:xfrm>
-            <a:prstGeom prst="rect">
-              <a:avLst/>
-            </a:prstGeom>
-          </p:spPr>
-        </p:pic>
-        <p:sp>
-          <p:nvSpPr>
-            <p:cNvPr id="11" name="TextBox 10">
-              <a:extLst>
-                <a:ext uri="{FF2B5EF4-FFF2-40B4-BE49-F238E27FC236}">
-                  <a16:creationId xmlns:a16="http://schemas.microsoft.com/office/drawing/2014/main" id="{27DAE457-A96B-4D0A-A8D2-F9B4AAC98AFB}"/>
-                </a:ext>
-              </a:extLst>
-            </p:cNvPr>
-            <p:cNvSpPr txBox="1"/>
-            <p:nvPr/>
-          </p:nvSpPr>
-          <p:spPr>
-            <a:xfrm>
-              <a:off x="4792717" y="5944552"/>
-              <a:ext cx="3795712" cy="323165"/>
-            </a:xfrm>
-            <a:prstGeom prst="rect">
-              <a:avLst/>
-            </a:prstGeom>
-            <a:noFill/>
-          </p:spPr>
-          <p:txBody>
-            <a:bodyPr wrap="square" rtlCol="0">
-              <a:spAutoFit/>
-            </a:bodyPr>
-            <a:lstStyle/>
-            <a:p>
-              <a:pPr algn="ctr"/>
-              <a:r>
-                <a:rPr lang="en-US" sz="1500" dirty="0"/>
-                <a:t>Facebook friendship social graph</a:t>
-              </a:r>
-            </a:p>
-          </p:txBody>
-        </p:sp>
-      </p:grpSp>
-    </p:spTree>
-    <p:extLst>
-      <p:ext uri="{BB962C8B-B14F-4D97-AF65-F5344CB8AC3E}">
-        <p14:creationId xmlns:p14="http://schemas.microsoft.com/office/powerpoint/2010/main" val="436343008"/>
-      </p:ext>
-    </p:extLst>
-  </p:cSld>
-  <p:clrMapOvr>
-    <a:masterClrMapping/>
-  </p:clrMapOvr>
-</p:sld>
-</file>
-
-<file path=ppt/slides/slide40.xml><?xml version="1.0" encoding="utf-8"?>
+<file path=ppt/slides/slide44.xml><?xml version="1.0" encoding="utf-8"?>
 <p:sld xmlns:a="http://schemas.openxmlformats.org/drawingml/2006/main" xmlns:r="http://schemas.openxmlformats.org/officeDocument/2006/relationships" xmlns:p="http://schemas.openxmlformats.org/presentationml/2006/main">
   <p:cSld>
     <p:spTree>
@@ -36079,7 +37959,7 @@
 </p:sld>
 </file>
 
-<file path=ppt/slides/slide41.xml><?xml version="1.0" encoding="utf-8"?>
+<file path=ppt/slides/slide45.xml><?xml version="1.0" encoding="utf-8"?>
 <p:sld xmlns:a="http://schemas.openxmlformats.org/drawingml/2006/main" xmlns:r="http://schemas.openxmlformats.org/officeDocument/2006/relationships" xmlns:p="http://schemas.openxmlformats.org/presentationml/2006/main">
   <p:cSld>
     <p:spTree>
